--- a/Sample code/Figure 6. Growth and ablation/Figure - growth_and_ablation.pptx
+++ b/Sample code/Figure 6. Growth and ablation/Figure - growth_and_ablation.pptx
@@ -2,19 +2,18 @@
 <file path=ppt/presentation.xml><?xml version="1.0" encoding="utf-8"?>
 <p:presentation xmlns:a="http://schemas.openxmlformats.org/drawingml/2006/main" xmlns:r="http://schemas.openxmlformats.org/officeDocument/2006/relationships" xmlns:p="http://schemas.openxmlformats.org/presentationml/2006/main" saveSubsetFonts="1" autoCompressPictures="0">
   <p:sldMasterIdLst>
-    <p:sldMasterId id="2147483648" r:id="rId1"/>
+    <p:sldMasterId id="2147483708" r:id="rId1"/>
   </p:sldMasterIdLst>
   <p:sldIdLst>
-    <p:sldId id="280" r:id="rId2"/>
-    <p:sldId id="281" r:id="rId3"/>
+    <p:sldId id="281" r:id="rId2"/>
   </p:sldIdLst>
-  <p:sldSz cx="12192000" cy="6858000"/>
+  <p:sldSz cx="4572000" cy="6400800"/>
   <p:notesSz cx="6858000" cy="9144000"/>
   <p:defaultTextStyle>
     <a:defPPr>
       <a:defRPr lang="en-US"/>
     </a:defPPr>
-    <a:lvl1pPr marL="0" algn="l" defTabSz="914400" rtl="0" eaLnBrk="1" latinLnBrk="0" hangingPunct="1">
+    <a:lvl1pPr marL="0" algn="l" defTabSz="457200" rtl="0" eaLnBrk="1" latinLnBrk="0" hangingPunct="1">
       <a:defRPr sz="1800" kern="1200">
         <a:solidFill>
           <a:schemeClr val="tx1"/>
@@ -24,7 +23,7 @@
         <a:cs typeface="+mn-cs"/>
       </a:defRPr>
     </a:lvl1pPr>
-    <a:lvl2pPr marL="457200" algn="l" defTabSz="914400" rtl="0" eaLnBrk="1" latinLnBrk="0" hangingPunct="1">
+    <a:lvl2pPr marL="457200" algn="l" defTabSz="457200" rtl="0" eaLnBrk="1" latinLnBrk="0" hangingPunct="1">
       <a:defRPr sz="1800" kern="1200">
         <a:solidFill>
           <a:schemeClr val="tx1"/>
@@ -34,7 +33,7 @@
         <a:cs typeface="+mn-cs"/>
       </a:defRPr>
     </a:lvl2pPr>
-    <a:lvl3pPr marL="914400" algn="l" defTabSz="914400" rtl="0" eaLnBrk="1" latinLnBrk="0" hangingPunct="1">
+    <a:lvl3pPr marL="914400" algn="l" defTabSz="457200" rtl="0" eaLnBrk="1" latinLnBrk="0" hangingPunct="1">
       <a:defRPr sz="1800" kern="1200">
         <a:solidFill>
           <a:schemeClr val="tx1"/>
@@ -44,7 +43,7 @@
         <a:cs typeface="+mn-cs"/>
       </a:defRPr>
     </a:lvl3pPr>
-    <a:lvl4pPr marL="1371600" algn="l" defTabSz="914400" rtl="0" eaLnBrk="1" latinLnBrk="0" hangingPunct="1">
+    <a:lvl4pPr marL="1371600" algn="l" defTabSz="457200" rtl="0" eaLnBrk="1" latinLnBrk="0" hangingPunct="1">
       <a:defRPr sz="1800" kern="1200">
         <a:solidFill>
           <a:schemeClr val="tx1"/>
@@ -54,7 +53,7 @@
         <a:cs typeface="+mn-cs"/>
       </a:defRPr>
     </a:lvl4pPr>
-    <a:lvl5pPr marL="1828800" algn="l" defTabSz="914400" rtl="0" eaLnBrk="1" latinLnBrk="0" hangingPunct="1">
+    <a:lvl5pPr marL="1828800" algn="l" defTabSz="457200" rtl="0" eaLnBrk="1" latinLnBrk="0" hangingPunct="1">
       <a:defRPr sz="1800" kern="1200">
         <a:solidFill>
           <a:schemeClr val="tx1"/>
@@ -64,7 +63,7 @@
         <a:cs typeface="+mn-cs"/>
       </a:defRPr>
     </a:lvl5pPr>
-    <a:lvl6pPr marL="2286000" algn="l" defTabSz="914400" rtl="0" eaLnBrk="1" latinLnBrk="0" hangingPunct="1">
+    <a:lvl6pPr marL="2286000" algn="l" defTabSz="457200" rtl="0" eaLnBrk="1" latinLnBrk="0" hangingPunct="1">
       <a:defRPr sz="1800" kern="1200">
         <a:solidFill>
           <a:schemeClr val="tx1"/>
@@ -74,7 +73,7 @@
         <a:cs typeface="+mn-cs"/>
       </a:defRPr>
     </a:lvl6pPr>
-    <a:lvl7pPr marL="2743200" algn="l" defTabSz="914400" rtl="0" eaLnBrk="1" latinLnBrk="0" hangingPunct="1">
+    <a:lvl7pPr marL="2743200" algn="l" defTabSz="457200" rtl="0" eaLnBrk="1" latinLnBrk="0" hangingPunct="1">
       <a:defRPr sz="1800" kern="1200">
         <a:solidFill>
           <a:schemeClr val="tx1"/>
@@ -84,7 +83,7 @@
         <a:cs typeface="+mn-cs"/>
       </a:defRPr>
     </a:lvl7pPr>
-    <a:lvl8pPr marL="3200400" algn="l" defTabSz="914400" rtl="0" eaLnBrk="1" latinLnBrk="0" hangingPunct="1">
+    <a:lvl8pPr marL="3200400" algn="l" defTabSz="457200" rtl="0" eaLnBrk="1" latinLnBrk="0" hangingPunct="1">
       <a:defRPr sz="1800" kern="1200">
         <a:solidFill>
           <a:schemeClr val="tx1"/>
@@ -94,7 +93,7 @@
         <a:cs typeface="+mn-cs"/>
       </a:defRPr>
     </a:lvl8pPr>
-    <a:lvl9pPr marL="3657600" algn="l" defTabSz="914400" rtl="0" eaLnBrk="1" latinLnBrk="0" hangingPunct="1">
+    <a:lvl9pPr marL="3657600" algn="l" defTabSz="457200" rtl="0" eaLnBrk="1" latinLnBrk="0" hangingPunct="1">
       <a:defRPr sz="1800" kern="1200">
         <a:solidFill>
           <a:schemeClr val="tx1"/>
@@ -132,13 +131,7 @@
       </p:grpSpPr>
       <p:sp>
         <p:nvSpPr>
-          <p:cNvPr id="2" name="Title 1">
-            <a:extLst>
-              <a:ext uri="{FF2B5EF4-FFF2-40B4-BE49-F238E27FC236}">
-                <a16:creationId xmlns:a16="http://schemas.microsoft.com/office/drawing/2014/main" id="{EF10D25D-58CE-AEED-445D-8C89FE20DFBA}"/>
-              </a:ext>
-            </a:extLst>
-          </p:cNvPr>
+          <p:cNvPr id="2" name="Title 1"/>
           <p:cNvSpPr>
             <a:spLocks noGrp="1"/>
           </p:cNvSpPr>
@@ -148,15 +141,15 @@
         </p:nvSpPr>
         <p:spPr>
           <a:xfrm>
-            <a:off x="1524000" y="1122363"/>
-            <a:ext cx="9144000" cy="2387600"/>
+            <a:off x="342900" y="1047539"/>
+            <a:ext cx="3886200" cy="2228427"/>
           </a:xfrm>
         </p:spPr>
         <p:txBody>
           <a:bodyPr anchor="b"/>
           <a:lstStyle>
             <a:lvl1pPr algn="ctr">
-              <a:defRPr sz="6000"/>
+              <a:defRPr sz="3000"/>
             </a:lvl1pPr>
           </a:lstStyle>
           <a:p>
@@ -164,18 +157,13 @@
               <a:rPr lang="en-US"/>
               <a:t>Click to edit Master title style</a:t>
             </a:r>
-          </a:p>
-        </p:txBody>
-      </p:sp>
-      <p:sp>
-        <p:nvSpPr>
-          <p:cNvPr id="3" name="Subtitle 2">
-            <a:extLst>
-              <a:ext uri="{FF2B5EF4-FFF2-40B4-BE49-F238E27FC236}">
-                <a16:creationId xmlns:a16="http://schemas.microsoft.com/office/drawing/2014/main" id="{CC0D5D22-CCB1-0EA6-F15F-9D7CC696E4F8}"/>
-              </a:ext>
-            </a:extLst>
-          </p:cNvPr>
+            <a:endParaRPr lang="en-US" dirty="0"/>
+          </a:p>
+        </p:txBody>
+      </p:sp>
+      <p:sp>
+        <p:nvSpPr>
+          <p:cNvPr id="3" name="Subtitle 2"/>
           <p:cNvSpPr>
             <a:spLocks noGrp="1"/>
           </p:cNvSpPr>
@@ -185,8 +173,8 @@
         </p:nvSpPr>
         <p:spPr>
           <a:xfrm>
-            <a:off x="1524000" y="3602038"/>
-            <a:ext cx="9144000" cy="1655762"/>
+            <a:off x="571500" y="3361902"/>
+            <a:ext cx="3429000" cy="1545378"/>
           </a:xfrm>
         </p:spPr>
         <p:txBody>
@@ -194,39 +182,39 @@
           <a:lstStyle>
             <a:lvl1pPr marL="0" indent="0" algn="ctr">
               <a:buNone/>
-              <a:defRPr sz="2400"/>
+              <a:defRPr sz="1200"/>
             </a:lvl1pPr>
-            <a:lvl2pPr marL="457200" indent="0" algn="ctr">
-              <a:buNone/>
-              <a:defRPr sz="2000"/>
+            <a:lvl2pPr marL="228600" indent="0" algn="ctr">
+              <a:buNone/>
+              <a:defRPr sz="1000"/>
             </a:lvl2pPr>
-            <a:lvl3pPr marL="914400" indent="0" algn="ctr">
-              <a:buNone/>
-              <a:defRPr sz="1800"/>
+            <a:lvl3pPr marL="457200" indent="0" algn="ctr">
+              <a:buNone/>
+              <a:defRPr sz="900"/>
             </a:lvl3pPr>
-            <a:lvl4pPr marL="1371600" indent="0" algn="ctr">
-              <a:buNone/>
-              <a:defRPr sz="1600"/>
+            <a:lvl4pPr marL="685800" indent="0" algn="ctr">
+              <a:buNone/>
+              <a:defRPr sz="800"/>
             </a:lvl4pPr>
-            <a:lvl5pPr marL="1828800" indent="0" algn="ctr">
-              <a:buNone/>
-              <a:defRPr sz="1600"/>
+            <a:lvl5pPr marL="914400" indent="0" algn="ctr">
+              <a:buNone/>
+              <a:defRPr sz="800"/>
             </a:lvl5pPr>
-            <a:lvl6pPr marL="2286000" indent="0" algn="ctr">
-              <a:buNone/>
-              <a:defRPr sz="1600"/>
+            <a:lvl6pPr marL="1143000" indent="0" algn="ctr">
+              <a:buNone/>
+              <a:defRPr sz="800"/>
             </a:lvl6pPr>
-            <a:lvl7pPr marL="2743200" indent="0" algn="ctr">
-              <a:buNone/>
-              <a:defRPr sz="1600"/>
+            <a:lvl7pPr marL="1371600" indent="0" algn="ctr">
+              <a:buNone/>
+              <a:defRPr sz="800"/>
             </a:lvl7pPr>
-            <a:lvl8pPr marL="3200400" indent="0" algn="ctr">
-              <a:buNone/>
-              <a:defRPr sz="1600"/>
+            <a:lvl8pPr marL="1600200" indent="0" algn="ctr">
+              <a:buNone/>
+              <a:defRPr sz="800"/>
             </a:lvl8pPr>
-            <a:lvl9pPr marL="3657600" indent="0" algn="ctr">
-              <a:buNone/>
-              <a:defRPr sz="1600"/>
+            <a:lvl9pPr marL="1828800" indent="0" algn="ctr">
+              <a:buNone/>
+              <a:defRPr sz="800"/>
             </a:lvl9pPr>
           </a:lstStyle>
           <a:p>
@@ -234,18 +222,13 @@
               <a:rPr lang="en-US"/>
               <a:t>Click to edit Master subtitle style</a:t>
             </a:r>
-          </a:p>
-        </p:txBody>
-      </p:sp>
-      <p:sp>
-        <p:nvSpPr>
-          <p:cNvPr id="4" name="Date Placeholder 3">
-            <a:extLst>
-              <a:ext uri="{FF2B5EF4-FFF2-40B4-BE49-F238E27FC236}">
-                <a16:creationId xmlns:a16="http://schemas.microsoft.com/office/drawing/2014/main" id="{19DA5137-9E44-CEAA-8688-67E3BAFDEAA8}"/>
-              </a:ext>
-            </a:extLst>
-          </p:cNvPr>
+            <a:endParaRPr lang="en-US" dirty="0"/>
+          </a:p>
+        </p:txBody>
+      </p:sp>
+      <p:sp>
+        <p:nvSpPr>
+          <p:cNvPr id="4" name="Date Placeholder 3"/>
           <p:cNvSpPr>
             <a:spLocks noGrp="1"/>
           </p:cNvSpPr>
@@ -260,7 +243,7 @@
           <a:p>
             <a:fld id="{7918679B-5683-0049-8DD0-2AC74A9489F6}" type="datetimeFigureOut">
               <a:rPr lang="en-US" smtClean="0"/>
-              <a:t>9/2/26</a:t>
+              <a:t>9/17/26</a:t>
             </a:fld>
             <a:endParaRPr lang="en-US"/>
           </a:p>
@@ -268,13 +251,7 @@
       </p:sp>
       <p:sp>
         <p:nvSpPr>
-          <p:cNvPr id="5" name="Footer Placeholder 4">
-            <a:extLst>
-              <a:ext uri="{FF2B5EF4-FFF2-40B4-BE49-F238E27FC236}">
-                <a16:creationId xmlns:a16="http://schemas.microsoft.com/office/drawing/2014/main" id="{C4B19B85-1B85-70E9-FEF6-61B0239D49CC}"/>
-              </a:ext>
-            </a:extLst>
-          </p:cNvPr>
+          <p:cNvPr id="5" name="Footer Placeholder 4"/>
           <p:cNvSpPr>
             <a:spLocks noGrp="1"/>
           </p:cNvSpPr>
@@ -293,13 +270,7 @@
       </p:sp>
       <p:sp>
         <p:nvSpPr>
-          <p:cNvPr id="6" name="Slide Number Placeholder 5">
-            <a:extLst>
-              <a:ext uri="{FF2B5EF4-FFF2-40B4-BE49-F238E27FC236}">
-                <a16:creationId xmlns:a16="http://schemas.microsoft.com/office/drawing/2014/main" id="{43CF76C1-628C-B520-9DF3-100E76045224}"/>
-              </a:ext>
-            </a:extLst>
-          </p:cNvPr>
+          <p:cNvPr id="6" name="Slide Number Placeholder 5"/>
           <p:cNvSpPr>
             <a:spLocks noGrp="1"/>
           </p:cNvSpPr>
@@ -323,7 +294,7 @@
     </p:spTree>
     <p:extLst>
       <p:ext uri="{BB962C8B-B14F-4D97-AF65-F5344CB8AC3E}">
-        <p14:creationId xmlns:p14="http://schemas.microsoft.com/office/powerpoint/2010/main" val="871634587"/>
+        <p14:creationId xmlns:p14="http://schemas.microsoft.com/office/powerpoint/2010/main" val="2391804736"/>
       </p:ext>
     </p:extLst>
   </p:cSld>
@@ -352,13 +323,7 @@
       </p:grpSpPr>
       <p:sp>
         <p:nvSpPr>
-          <p:cNvPr id="2" name="Title 1">
-            <a:extLst>
-              <a:ext uri="{FF2B5EF4-FFF2-40B4-BE49-F238E27FC236}">
-                <a16:creationId xmlns:a16="http://schemas.microsoft.com/office/drawing/2014/main" id="{AD081094-6711-42A5-F6AE-BA38AEAAFA5A}"/>
-              </a:ext>
-            </a:extLst>
-          </p:cNvPr>
+          <p:cNvPr id="2" name="Title 1"/>
           <p:cNvSpPr>
             <a:spLocks noGrp="1"/>
           </p:cNvSpPr>
@@ -375,18 +340,13 @@
               <a:rPr lang="en-US"/>
               <a:t>Click to edit Master title style</a:t>
             </a:r>
-          </a:p>
-        </p:txBody>
-      </p:sp>
-      <p:sp>
-        <p:nvSpPr>
-          <p:cNvPr id="3" name="Vertical Text Placeholder 2">
-            <a:extLst>
-              <a:ext uri="{FF2B5EF4-FFF2-40B4-BE49-F238E27FC236}">
-                <a16:creationId xmlns:a16="http://schemas.microsoft.com/office/drawing/2014/main" id="{0638080B-0358-04D8-8DF2-19857F16B4EC}"/>
-              </a:ext>
-            </a:extLst>
-          </p:cNvPr>
+            <a:endParaRPr lang="en-US" dirty="0"/>
+          </a:p>
+        </p:txBody>
+      </p:sp>
+      <p:sp>
+        <p:nvSpPr>
+          <p:cNvPr id="3" name="Vertical Text Placeholder 2"/>
           <p:cNvSpPr>
             <a:spLocks noGrp="1"/>
           </p:cNvSpPr>
@@ -432,18 +392,13 @@
               <a:rPr lang="en-US"/>
               <a:t>Fifth level</a:t>
             </a:r>
-          </a:p>
-        </p:txBody>
-      </p:sp>
-      <p:sp>
-        <p:nvSpPr>
-          <p:cNvPr id="4" name="Date Placeholder 3">
-            <a:extLst>
-              <a:ext uri="{FF2B5EF4-FFF2-40B4-BE49-F238E27FC236}">
-                <a16:creationId xmlns:a16="http://schemas.microsoft.com/office/drawing/2014/main" id="{247CFBC8-9363-0FC0-8CFA-394C8031A468}"/>
-              </a:ext>
-            </a:extLst>
-          </p:cNvPr>
+            <a:endParaRPr lang="en-US" dirty="0"/>
+          </a:p>
+        </p:txBody>
+      </p:sp>
+      <p:sp>
+        <p:nvSpPr>
+          <p:cNvPr id="4" name="Date Placeholder 3"/>
           <p:cNvSpPr>
             <a:spLocks noGrp="1"/>
           </p:cNvSpPr>
@@ -458,7 +413,7 @@
           <a:p>
             <a:fld id="{7918679B-5683-0049-8DD0-2AC74A9489F6}" type="datetimeFigureOut">
               <a:rPr lang="en-US" smtClean="0"/>
-              <a:t>9/2/26</a:t>
+              <a:t>9/17/26</a:t>
             </a:fld>
             <a:endParaRPr lang="en-US"/>
           </a:p>
@@ -466,13 +421,7 @@
       </p:sp>
       <p:sp>
         <p:nvSpPr>
-          <p:cNvPr id="5" name="Footer Placeholder 4">
-            <a:extLst>
-              <a:ext uri="{FF2B5EF4-FFF2-40B4-BE49-F238E27FC236}">
-                <a16:creationId xmlns:a16="http://schemas.microsoft.com/office/drawing/2014/main" id="{864944EC-ED8E-1997-51F2-D5A271D3FB9A}"/>
-              </a:ext>
-            </a:extLst>
-          </p:cNvPr>
+          <p:cNvPr id="5" name="Footer Placeholder 4"/>
           <p:cNvSpPr>
             <a:spLocks noGrp="1"/>
           </p:cNvSpPr>
@@ -491,13 +440,7 @@
       </p:sp>
       <p:sp>
         <p:nvSpPr>
-          <p:cNvPr id="6" name="Slide Number Placeholder 5">
-            <a:extLst>
-              <a:ext uri="{FF2B5EF4-FFF2-40B4-BE49-F238E27FC236}">
-                <a16:creationId xmlns:a16="http://schemas.microsoft.com/office/drawing/2014/main" id="{6F73F73B-4E6E-5EF4-1C7D-743CFAB99DAC}"/>
-              </a:ext>
-            </a:extLst>
-          </p:cNvPr>
+          <p:cNvPr id="6" name="Slide Number Placeholder 5"/>
           <p:cNvSpPr>
             <a:spLocks noGrp="1"/>
           </p:cNvSpPr>
@@ -521,7 +464,7 @@
     </p:spTree>
     <p:extLst>
       <p:ext uri="{BB962C8B-B14F-4D97-AF65-F5344CB8AC3E}">
-        <p14:creationId xmlns:p14="http://schemas.microsoft.com/office/powerpoint/2010/main" val="3773601710"/>
+        <p14:creationId xmlns:p14="http://schemas.microsoft.com/office/powerpoint/2010/main" val="2468393919"/>
       </p:ext>
     </p:extLst>
   </p:cSld>
@@ -550,13 +493,7 @@
       </p:grpSpPr>
       <p:sp>
         <p:nvSpPr>
-          <p:cNvPr id="2" name="Vertical Title 1">
-            <a:extLst>
-              <a:ext uri="{FF2B5EF4-FFF2-40B4-BE49-F238E27FC236}">
-                <a16:creationId xmlns:a16="http://schemas.microsoft.com/office/drawing/2014/main" id="{9E840208-5F14-E933-0A65-329A22A59227}"/>
-              </a:ext>
-            </a:extLst>
-          </p:cNvPr>
+          <p:cNvPr id="2" name="Vertical Title 1"/>
           <p:cNvSpPr>
             <a:spLocks noGrp="1"/>
           </p:cNvSpPr>
@@ -566,8 +503,8 @@
         </p:nvSpPr>
         <p:spPr>
           <a:xfrm>
-            <a:off x="8724900" y="365125"/>
-            <a:ext cx="2628900" cy="5811838"/>
+            <a:off x="3271838" y="340783"/>
+            <a:ext cx="985838" cy="5424382"/>
           </a:xfrm>
         </p:spPr>
         <p:txBody>
@@ -578,18 +515,13 @@
               <a:rPr lang="en-US"/>
               <a:t>Click to edit Master title style</a:t>
             </a:r>
-          </a:p>
-        </p:txBody>
-      </p:sp>
-      <p:sp>
-        <p:nvSpPr>
-          <p:cNvPr id="3" name="Vertical Text Placeholder 2">
-            <a:extLst>
-              <a:ext uri="{FF2B5EF4-FFF2-40B4-BE49-F238E27FC236}">
-                <a16:creationId xmlns:a16="http://schemas.microsoft.com/office/drawing/2014/main" id="{87DAE43A-80E8-EDE8-1F13-C6D471551CE9}"/>
-              </a:ext>
-            </a:extLst>
-          </p:cNvPr>
+            <a:endParaRPr lang="en-US" dirty="0"/>
+          </a:p>
+        </p:txBody>
+      </p:sp>
+      <p:sp>
+        <p:nvSpPr>
+          <p:cNvPr id="3" name="Vertical Text Placeholder 2"/>
           <p:cNvSpPr>
             <a:spLocks noGrp="1"/>
           </p:cNvSpPr>
@@ -599,8 +531,8 @@
         </p:nvSpPr>
         <p:spPr>
           <a:xfrm>
-            <a:off x="838200" y="365125"/>
-            <a:ext cx="7734300" cy="5811838"/>
+            <a:off x="314325" y="340783"/>
+            <a:ext cx="2900363" cy="5424382"/>
           </a:xfrm>
         </p:spPr>
         <p:txBody>
@@ -640,18 +572,13 @@
               <a:rPr lang="en-US"/>
               <a:t>Fifth level</a:t>
             </a:r>
-          </a:p>
-        </p:txBody>
-      </p:sp>
-      <p:sp>
-        <p:nvSpPr>
-          <p:cNvPr id="4" name="Date Placeholder 3">
-            <a:extLst>
-              <a:ext uri="{FF2B5EF4-FFF2-40B4-BE49-F238E27FC236}">
-                <a16:creationId xmlns:a16="http://schemas.microsoft.com/office/drawing/2014/main" id="{9A91B3E1-8145-D23E-6FCC-D4D8891B8D5E}"/>
-              </a:ext>
-            </a:extLst>
-          </p:cNvPr>
+            <a:endParaRPr lang="en-US" dirty="0"/>
+          </a:p>
+        </p:txBody>
+      </p:sp>
+      <p:sp>
+        <p:nvSpPr>
+          <p:cNvPr id="4" name="Date Placeholder 3"/>
           <p:cNvSpPr>
             <a:spLocks noGrp="1"/>
           </p:cNvSpPr>
@@ -666,7 +593,7 @@
           <a:p>
             <a:fld id="{7918679B-5683-0049-8DD0-2AC74A9489F6}" type="datetimeFigureOut">
               <a:rPr lang="en-US" smtClean="0"/>
-              <a:t>9/2/26</a:t>
+              <a:t>9/17/26</a:t>
             </a:fld>
             <a:endParaRPr lang="en-US"/>
           </a:p>
@@ -674,13 +601,7 @@
       </p:sp>
       <p:sp>
         <p:nvSpPr>
-          <p:cNvPr id="5" name="Footer Placeholder 4">
-            <a:extLst>
-              <a:ext uri="{FF2B5EF4-FFF2-40B4-BE49-F238E27FC236}">
-                <a16:creationId xmlns:a16="http://schemas.microsoft.com/office/drawing/2014/main" id="{EF4CA5D7-3818-6A43-726D-460F8CBBA7A7}"/>
-              </a:ext>
-            </a:extLst>
-          </p:cNvPr>
+          <p:cNvPr id="5" name="Footer Placeholder 4"/>
           <p:cNvSpPr>
             <a:spLocks noGrp="1"/>
           </p:cNvSpPr>
@@ -699,13 +620,7 @@
       </p:sp>
       <p:sp>
         <p:nvSpPr>
-          <p:cNvPr id="6" name="Slide Number Placeholder 5">
-            <a:extLst>
-              <a:ext uri="{FF2B5EF4-FFF2-40B4-BE49-F238E27FC236}">
-                <a16:creationId xmlns:a16="http://schemas.microsoft.com/office/drawing/2014/main" id="{55178319-DE4C-35C3-8735-CA40E3B81F99}"/>
-              </a:ext>
-            </a:extLst>
-          </p:cNvPr>
+          <p:cNvPr id="6" name="Slide Number Placeholder 5"/>
           <p:cNvSpPr>
             <a:spLocks noGrp="1"/>
           </p:cNvSpPr>
@@ -729,7 +644,7 @@
     </p:spTree>
     <p:extLst>
       <p:ext uri="{BB962C8B-B14F-4D97-AF65-F5344CB8AC3E}">
-        <p14:creationId xmlns:p14="http://schemas.microsoft.com/office/powerpoint/2010/main" val="1516958743"/>
+        <p14:creationId xmlns:p14="http://schemas.microsoft.com/office/powerpoint/2010/main" val="4206153860"/>
       </p:ext>
     </p:extLst>
   </p:cSld>
@@ -758,13 +673,7 @@
       </p:grpSpPr>
       <p:sp>
         <p:nvSpPr>
-          <p:cNvPr id="2" name="Title 1">
-            <a:extLst>
-              <a:ext uri="{FF2B5EF4-FFF2-40B4-BE49-F238E27FC236}">
-                <a16:creationId xmlns:a16="http://schemas.microsoft.com/office/drawing/2014/main" id="{81CF6B24-1136-549B-B07C-06D6925966DA}"/>
-              </a:ext>
-            </a:extLst>
-          </p:cNvPr>
+          <p:cNvPr id="2" name="Title 1"/>
           <p:cNvSpPr>
             <a:spLocks noGrp="1"/>
           </p:cNvSpPr>
@@ -781,18 +690,13 @@
               <a:rPr lang="en-US"/>
               <a:t>Click to edit Master title style</a:t>
             </a:r>
-          </a:p>
-        </p:txBody>
-      </p:sp>
-      <p:sp>
-        <p:nvSpPr>
-          <p:cNvPr id="3" name="Content Placeholder 2">
-            <a:extLst>
-              <a:ext uri="{FF2B5EF4-FFF2-40B4-BE49-F238E27FC236}">
-                <a16:creationId xmlns:a16="http://schemas.microsoft.com/office/drawing/2014/main" id="{179D4B10-D5F8-E3E9-84B0-2B4C755985F3}"/>
-              </a:ext>
-            </a:extLst>
-          </p:cNvPr>
+            <a:endParaRPr lang="en-US" dirty="0"/>
+          </a:p>
+        </p:txBody>
+      </p:sp>
+      <p:sp>
+        <p:nvSpPr>
+          <p:cNvPr id="3" name="Content Placeholder 2"/>
           <p:cNvSpPr>
             <a:spLocks noGrp="1"/>
           </p:cNvSpPr>
@@ -838,18 +742,13 @@
               <a:rPr lang="en-US"/>
               <a:t>Fifth level</a:t>
             </a:r>
-          </a:p>
-        </p:txBody>
-      </p:sp>
-      <p:sp>
-        <p:nvSpPr>
-          <p:cNvPr id="4" name="Date Placeholder 3">
-            <a:extLst>
-              <a:ext uri="{FF2B5EF4-FFF2-40B4-BE49-F238E27FC236}">
-                <a16:creationId xmlns:a16="http://schemas.microsoft.com/office/drawing/2014/main" id="{3395C4CC-D333-7F0D-C251-42B622883B69}"/>
-              </a:ext>
-            </a:extLst>
-          </p:cNvPr>
+            <a:endParaRPr lang="en-US" dirty="0"/>
+          </a:p>
+        </p:txBody>
+      </p:sp>
+      <p:sp>
+        <p:nvSpPr>
+          <p:cNvPr id="4" name="Date Placeholder 3"/>
           <p:cNvSpPr>
             <a:spLocks noGrp="1"/>
           </p:cNvSpPr>
@@ -864,7 +763,7 @@
           <a:p>
             <a:fld id="{7918679B-5683-0049-8DD0-2AC74A9489F6}" type="datetimeFigureOut">
               <a:rPr lang="en-US" smtClean="0"/>
-              <a:t>9/2/26</a:t>
+              <a:t>9/17/26</a:t>
             </a:fld>
             <a:endParaRPr lang="en-US"/>
           </a:p>
@@ -872,13 +771,7 @@
       </p:sp>
       <p:sp>
         <p:nvSpPr>
-          <p:cNvPr id="5" name="Footer Placeholder 4">
-            <a:extLst>
-              <a:ext uri="{FF2B5EF4-FFF2-40B4-BE49-F238E27FC236}">
-                <a16:creationId xmlns:a16="http://schemas.microsoft.com/office/drawing/2014/main" id="{9A8A3CAE-3560-6D3D-57D4-6DBA6945A057}"/>
-              </a:ext>
-            </a:extLst>
-          </p:cNvPr>
+          <p:cNvPr id="5" name="Footer Placeholder 4"/>
           <p:cNvSpPr>
             <a:spLocks noGrp="1"/>
           </p:cNvSpPr>
@@ -897,13 +790,7 @@
       </p:sp>
       <p:sp>
         <p:nvSpPr>
-          <p:cNvPr id="6" name="Slide Number Placeholder 5">
-            <a:extLst>
-              <a:ext uri="{FF2B5EF4-FFF2-40B4-BE49-F238E27FC236}">
-                <a16:creationId xmlns:a16="http://schemas.microsoft.com/office/drawing/2014/main" id="{606DB3D7-EDE8-F34A-1636-E2E17F8ED786}"/>
-              </a:ext>
-            </a:extLst>
-          </p:cNvPr>
+          <p:cNvPr id="6" name="Slide Number Placeholder 5"/>
           <p:cNvSpPr>
             <a:spLocks noGrp="1"/>
           </p:cNvSpPr>
@@ -927,7 +814,7 @@
     </p:spTree>
     <p:extLst>
       <p:ext uri="{BB962C8B-B14F-4D97-AF65-F5344CB8AC3E}">
-        <p14:creationId xmlns:p14="http://schemas.microsoft.com/office/powerpoint/2010/main" val="3352164838"/>
+        <p14:creationId xmlns:p14="http://schemas.microsoft.com/office/powerpoint/2010/main" val="711397316"/>
       </p:ext>
     </p:extLst>
   </p:cSld>
@@ -956,13 +843,7 @@
       </p:grpSpPr>
       <p:sp>
         <p:nvSpPr>
-          <p:cNvPr id="2" name="Title 1">
-            <a:extLst>
-              <a:ext uri="{FF2B5EF4-FFF2-40B4-BE49-F238E27FC236}">
-                <a16:creationId xmlns:a16="http://schemas.microsoft.com/office/drawing/2014/main" id="{10E52339-60BF-4222-CF6E-AC99A60A3104}"/>
-              </a:ext>
-            </a:extLst>
-          </p:cNvPr>
+          <p:cNvPr id="2" name="Title 1"/>
           <p:cNvSpPr>
             <a:spLocks noGrp="1"/>
           </p:cNvSpPr>
@@ -972,15 +853,15 @@
         </p:nvSpPr>
         <p:spPr>
           <a:xfrm>
-            <a:off x="831850" y="1709738"/>
-            <a:ext cx="10515600" cy="2852737"/>
+            <a:off x="311944" y="1595757"/>
+            <a:ext cx="3943350" cy="2662555"/>
           </a:xfrm>
         </p:spPr>
         <p:txBody>
           <a:bodyPr anchor="b"/>
           <a:lstStyle>
             <a:lvl1pPr>
-              <a:defRPr sz="6000"/>
+              <a:defRPr sz="3000"/>
             </a:lvl1pPr>
           </a:lstStyle>
           <a:p>
@@ -988,18 +869,13 @@
               <a:rPr lang="en-US"/>
               <a:t>Click to edit Master title style</a:t>
             </a:r>
-          </a:p>
-        </p:txBody>
-      </p:sp>
-      <p:sp>
-        <p:nvSpPr>
-          <p:cNvPr id="3" name="Text Placeholder 2">
-            <a:extLst>
-              <a:ext uri="{FF2B5EF4-FFF2-40B4-BE49-F238E27FC236}">
-                <a16:creationId xmlns:a16="http://schemas.microsoft.com/office/drawing/2014/main" id="{53C68932-7BC7-73B3-1EF4-91547CC0F50A}"/>
-              </a:ext>
-            </a:extLst>
-          </p:cNvPr>
+            <a:endParaRPr lang="en-US" dirty="0"/>
+          </a:p>
+        </p:txBody>
+      </p:sp>
+      <p:sp>
+        <p:nvSpPr>
+          <p:cNvPr id="3" name="Text Placeholder 2"/>
           <p:cNvSpPr>
             <a:spLocks noGrp="1"/>
           </p:cNvSpPr>
@@ -1009,8 +885,8 @@
         </p:nvSpPr>
         <p:spPr>
           <a:xfrm>
-            <a:off x="831850" y="4589463"/>
-            <a:ext cx="10515600" cy="1500187"/>
+            <a:off x="311944" y="4283500"/>
+            <a:ext cx="3943350" cy="1400175"/>
           </a:xfrm>
         </p:spPr>
         <p:txBody>
@@ -1018,17 +894,15 @@
           <a:lstStyle>
             <a:lvl1pPr marL="0" indent="0">
               <a:buNone/>
-              <a:defRPr sz="2400">
+              <a:defRPr sz="1200">
                 <a:solidFill>
-                  <a:schemeClr val="tx1">
-                    <a:tint val="75000"/>
-                  </a:schemeClr>
+                  <a:schemeClr val="tx1"/>
                 </a:solidFill>
               </a:defRPr>
             </a:lvl1pPr>
-            <a:lvl2pPr marL="457200" indent="0">
-              <a:buNone/>
-              <a:defRPr sz="2000">
+            <a:lvl2pPr marL="228600" indent="0">
+              <a:buNone/>
+              <a:defRPr sz="1000">
                 <a:solidFill>
                   <a:schemeClr val="tx1">
                     <a:tint val="75000"/>
@@ -1036,9 +910,9 @@
                 </a:solidFill>
               </a:defRPr>
             </a:lvl2pPr>
-            <a:lvl3pPr marL="914400" indent="0">
-              <a:buNone/>
-              <a:defRPr sz="1800">
+            <a:lvl3pPr marL="457200" indent="0">
+              <a:buNone/>
+              <a:defRPr sz="900">
                 <a:solidFill>
                   <a:schemeClr val="tx1">
                     <a:tint val="75000"/>
@@ -1046,9 +920,9 @@
                 </a:solidFill>
               </a:defRPr>
             </a:lvl3pPr>
-            <a:lvl4pPr marL="1371600" indent="0">
-              <a:buNone/>
-              <a:defRPr sz="1600">
+            <a:lvl4pPr marL="685800" indent="0">
+              <a:buNone/>
+              <a:defRPr sz="800">
                 <a:solidFill>
                   <a:schemeClr val="tx1">
                     <a:tint val="75000"/>
@@ -1056,9 +930,9 @@
                 </a:solidFill>
               </a:defRPr>
             </a:lvl4pPr>
-            <a:lvl5pPr marL="1828800" indent="0">
-              <a:buNone/>
-              <a:defRPr sz="1600">
+            <a:lvl5pPr marL="914400" indent="0">
+              <a:buNone/>
+              <a:defRPr sz="800">
                 <a:solidFill>
                   <a:schemeClr val="tx1">
                     <a:tint val="75000"/>
@@ -1066,9 +940,9 @@
                 </a:solidFill>
               </a:defRPr>
             </a:lvl5pPr>
-            <a:lvl6pPr marL="2286000" indent="0">
-              <a:buNone/>
-              <a:defRPr sz="1600">
+            <a:lvl6pPr marL="1143000" indent="0">
+              <a:buNone/>
+              <a:defRPr sz="800">
                 <a:solidFill>
                   <a:schemeClr val="tx1">
                     <a:tint val="75000"/>
@@ -1076,9 +950,9 @@
                 </a:solidFill>
               </a:defRPr>
             </a:lvl6pPr>
-            <a:lvl7pPr marL="2743200" indent="0">
-              <a:buNone/>
-              <a:defRPr sz="1600">
+            <a:lvl7pPr marL="1371600" indent="0">
+              <a:buNone/>
+              <a:defRPr sz="800">
                 <a:solidFill>
                   <a:schemeClr val="tx1">
                     <a:tint val="75000"/>
@@ -1086,9 +960,9 @@
                 </a:solidFill>
               </a:defRPr>
             </a:lvl7pPr>
-            <a:lvl8pPr marL="3200400" indent="0">
-              <a:buNone/>
-              <a:defRPr sz="1600">
+            <a:lvl8pPr marL="1600200" indent="0">
+              <a:buNone/>
+              <a:defRPr sz="800">
                 <a:solidFill>
                   <a:schemeClr val="tx1">
                     <a:tint val="75000"/>
@@ -1096,9 +970,9 @@
                 </a:solidFill>
               </a:defRPr>
             </a:lvl8pPr>
-            <a:lvl9pPr marL="3657600" indent="0">
-              <a:buNone/>
-              <a:defRPr sz="1600">
+            <a:lvl9pPr marL="1828800" indent="0">
+              <a:buNone/>
+              <a:defRPr sz="800">
                 <a:solidFill>
                   <a:schemeClr val="tx1">
                     <a:tint val="75000"/>
@@ -1118,13 +992,7 @@
       </p:sp>
       <p:sp>
         <p:nvSpPr>
-          <p:cNvPr id="4" name="Date Placeholder 3">
-            <a:extLst>
-              <a:ext uri="{FF2B5EF4-FFF2-40B4-BE49-F238E27FC236}">
-                <a16:creationId xmlns:a16="http://schemas.microsoft.com/office/drawing/2014/main" id="{EA46E8A2-B910-DF1D-C124-2F1986D7E95D}"/>
-              </a:ext>
-            </a:extLst>
-          </p:cNvPr>
+          <p:cNvPr id="4" name="Date Placeholder 3"/>
           <p:cNvSpPr>
             <a:spLocks noGrp="1"/>
           </p:cNvSpPr>
@@ -1139,7 +1007,7 @@
           <a:p>
             <a:fld id="{7918679B-5683-0049-8DD0-2AC74A9489F6}" type="datetimeFigureOut">
               <a:rPr lang="en-US" smtClean="0"/>
-              <a:t>9/2/26</a:t>
+              <a:t>9/17/26</a:t>
             </a:fld>
             <a:endParaRPr lang="en-US"/>
           </a:p>
@@ -1147,13 +1015,7 @@
       </p:sp>
       <p:sp>
         <p:nvSpPr>
-          <p:cNvPr id="5" name="Footer Placeholder 4">
-            <a:extLst>
-              <a:ext uri="{FF2B5EF4-FFF2-40B4-BE49-F238E27FC236}">
-                <a16:creationId xmlns:a16="http://schemas.microsoft.com/office/drawing/2014/main" id="{74F2545F-753F-571E-7D06-A4BD6E4DAB1E}"/>
-              </a:ext>
-            </a:extLst>
-          </p:cNvPr>
+          <p:cNvPr id="5" name="Footer Placeholder 4"/>
           <p:cNvSpPr>
             <a:spLocks noGrp="1"/>
           </p:cNvSpPr>
@@ -1172,13 +1034,7 @@
       </p:sp>
       <p:sp>
         <p:nvSpPr>
-          <p:cNvPr id="6" name="Slide Number Placeholder 5">
-            <a:extLst>
-              <a:ext uri="{FF2B5EF4-FFF2-40B4-BE49-F238E27FC236}">
-                <a16:creationId xmlns:a16="http://schemas.microsoft.com/office/drawing/2014/main" id="{93F8766A-A588-14BF-8DD9-CB7CD8F72EE2}"/>
-              </a:ext>
-            </a:extLst>
-          </p:cNvPr>
+          <p:cNvPr id="6" name="Slide Number Placeholder 5"/>
           <p:cNvSpPr>
             <a:spLocks noGrp="1"/>
           </p:cNvSpPr>
@@ -1202,7 +1058,7 @@
     </p:spTree>
     <p:extLst>
       <p:ext uri="{BB962C8B-B14F-4D97-AF65-F5344CB8AC3E}">
-        <p14:creationId xmlns:p14="http://schemas.microsoft.com/office/powerpoint/2010/main" val="1456037604"/>
+        <p14:creationId xmlns:p14="http://schemas.microsoft.com/office/powerpoint/2010/main" val="3058005727"/>
       </p:ext>
     </p:extLst>
   </p:cSld>
@@ -1231,13 +1087,7 @@
       </p:grpSpPr>
       <p:sp>
         <p:nvSpPr>
-          <p:cNvPr id="2" name="Title 1">
-            <a:extLst>
-              <a:ext uri="{FF2B5EF4-FFF2-40B4-BE49-F238E27FC236}">
-                <a16:creationId xmlns:a16="http://schemas.microsoft.com/office/drawing/2014/main" id="{575FEF62-2328-31B6-C3EC-20E7E8951EB9}"/>
-              </a:ext>
-            </a:extLst>
-          </p:cNvPr>
+          <p:cNvPr id="2" name="Title 1"/>
           <p:cNvSpPr>
             <a:spLocks noGrp="1"/>
           </p:cNvSpPr>
@@ -1254,18 +1104,13 @@
               <a:rPr lang="en-US"/>
               <a:t>Click to edit Master title style</a:t>
             </a:r>
-          </a:p>
-        </p:txBody>
-      </p:sp>
-      <p:sp>
-        <p:nvSpPr>
-          <p:cNvPr id="3" name="Content Placeholder 2">
-            <a:extLst>
-              <a:ext uri="{FF2B5EF4-FFF2-40B4-BE49-F238E27FC236}">
-                <a16:creationId xmlns:a16="http://schemas.microsoft.com/office/drawing/2014/main" id="{C23F8F06-F422-D95B-DBA5-06EF4ADCB802}"/>
-              </a:ext>
-            </a:extLst>
-          </p:cNvPr>
+            <a:endParaRPr lang="en-US" dirty="0"/>
+          </a:p>
+        </p:txBody>
+      </p:sp>
+      <p:sp>
+        <p:nvSpPr>
+          <p:cNvPr id="3" name="Content Placeholder 2"/>
           <p:cNvSpPr>
             <a:spLocks noGrp="1"/>
           </p:cNvSpPr>
@@ -1275,8 +1120,8 @@
         </p:nvSpPr>
         <p:spPr>
           <a:xfrm>
-            <a:off x="838200" y="1825625"/>
-            <a:ext cx="5181600" cy="4351338"/>
+            <a:off x="314325" y="1703917"/>
+            <a:ext cx="1943100" cy="4061249"/>
           </a:xfrm>
         </p:spPr>
         <p:txBody>
@@ -1316,18 +1161,13 @@
               <a:rPr lang="en-US"/>
               <a:t>Fifth level</a:t>
             </a:r>
-          </a:p>
-        </p:txBody>
-      </p:sp>
-      <p:sp>
-        <p:nvSpPr>
-          <p:cNvPr id="4" name="Content Placeholder 3">
-            <a:extLst>
-              <a:ext uri="{FF2B5EF4-FFF2-40B4-BE49-F238E27FC236}">
-                <a16:creationId xmlns:a16="http://schemas.microsoft.com/office/drawing/2014/main" id="{DFD60DEE-C126-379E-BEF4-16373B2E282D}"/>
-              </a:ext>
-            </a:extLst>
-          </p:cNvPr>
+            <a:endParaRPr lang="en-US" dirty="0"/>
+          </a:p>
+        </p:txBody>
+      </p:sp>
+      <p:sp>
+        <p:nvSpPr>
+          <p:cNvPr id="4" name="Content Placeholder 3"/>
           <p:cNvSpPr>
             <a:spLocks noGrp="1"/>
           </p:cNvSpPr>
@@ -1337,8 +1177,8 @@
         </p:nvSpPr>
         <p:spPr>
           <a:xfrm>
-            <a:off x="6172200" y="1825625"/>
-            <a:ext cx="5181600" cy="4351338"/>
+            <a:off x="2314575" y="1703917"/>
+            <a:ext cx="1943100" cy="4061249"/>
           </a:xfrm>
         </p:spPr>
         <p:txBody>
@@ -1378,18 +1218,13 @@
               <a:rPr lang="en-US"/>
               <a:t>Fifth level</a:t>
             </a:r>
-          </a:p>
-        </p:txBody>
-      </p:sp>
-      <p:sp>
-        <p:nvSpPr>
-          <p:cNvPr id="5" name="Date Placeholder 4">
-            <a:extLst>
-              <a:ext uri="{FF2B5EF4-FFF2-40B4-BE49-F238E27FC236}">
-                <a16:creationId xmlns:a16="http://schemas.microsoft.com/office/drawing/2014/main" id="{B23328CD-65D5-9C49-64F2-25207E202291}"/>
-              </a:ext>
-            </a:extLst>
-          </p:cNvPr>
+            <a:endParaRPr lang="en-US" dirty="0"/>
+          </a:p>
+        </p:txBody>
+      </p:sp>
+      <p:sp>
+        <p:nvSpPr>
+          <p:cNvPr id="5" name="Date Placeholder 4"/>
           <p:cNvSpPr>
             <a:spLocks noGrp="1"/>
           </p:cNvSpPr>
@@ -1404,7 +1239,7 @@
           <a:p>
             <a:fld id="{7918679B-5683-0049-8DD0-2AC74A9489F6}" type="datetimeFigureOut">
               <a:rPr lang="en-US" smtClean="0"/>
-              <a:t>9/2/26</a:t>
+              <a:t>9/17/26</a:t>
             </a:fld>
             <a:endParaRPr lang="en-US"/>
           </a:p>
@@ -1412,13 +1247,7 @@
       </p:sp>
       <p:sp>
         <p:nvSpPr>
-          <p:cNvPr id="6" name="Footer Placeholder 5">
-            <a:extLst>
-              <a:ext uri="{FF2B5EF4-FFF2-40B4-BE49-F238E27FC236}">
-                <a16:creationId xmlns:a16="http://schemas.microsoft.com/office/drawing/2014/main" id="{A6E9572C-809F-71FB-9F38-E1C46F705124}"/>
-              </a:ext>
-            </a:extLst>
-          </p:cNvPr>
+          <p:cNvPr id="6" name="Footer Placeholder 5"/>
           <p:cNvSpPr>
             <a:spLocks noGrp="1"/>
           </p:cNvSpPr>
@@ -1437,13 +1266,7 @@
       </p:sp>
       <p:sp>
         <p:nvSpPr>
-          <p:cNvPr id="7" name="Slide Number Placeholder 6">
-            <a:extLst>
-              <a:ext uri="{FF2B5EF4-FFF2-40B4-BE49-F238E27FC236}">
-                <a16:creationId xmlns:a16="http://schemas.microsoft.com/office/drawing/2014/main" id="{313C5E61-B353-B168-F690-2C1FCE62309E}"/>
-              </a:ext>
-            </a:extLst>
-          </p:cNvPr>
+          <p:cNvPr id="7" name="Slide Number Placeholder 6"/>
           <p:cNvSpPr>
             <a:spLocks noGrp="1"/>
           </p:cNvSpPr>
@@ -1467,7 +1290,7 @@
     </p:spTree>
     <p:extLst>
       <p:ext uri="{BB962C8B-B14F-4D97-AF65-F5344CB8AC3E}">
-        <p14:creationId xmlns:p14="http://schemas.microsoft.com/office/powerpoint/2010/main" val="2952006953"/>
+        <p14:creationId xmlns:p14="http://schemas.microsoft.com/office/powerpoint/2010/main" val="3391226142"/>
       </p:ext>
     </p:extLst>
   </p:cSld>
@@ -1496,13 +1319,7 @@
       </p:grpSpPr>
       <p:sp>
         <p:nvSpPr>
-          <p:cNvPr id="2" name="Title 1">
-            <a:extLst>
-              <a:ext uri="{FF2B5EF4-FFF2-40B4-BE49-F238E27FC236}">
-                <a16:creationId xmlns:a16="http://schemas.microsoft.com/office/drawing/2014/main" id="{B51F6A92-5758-5574-750F-E47BC092EE22}"/>
-              </a:ext>
-            </a:extLst>
-          </p:cNvPr>
+          <p:cNvPr id="2" name="Title 1"/>
           <p:cNvSpPr>
             <a:spLocks noGrp="1"/>
           </p:cNvSpPr>
@@ -1512,8 +1329,8 @@
         </p:nvSpPr>
         <p:spPr>
           <a:xfrm>
-            <a:off x="839788" y="365125"/>
-            <a:ext cx="10515600" cy="1325563"/>
+            <a:off x="314920" y="340785"/>
+            <a:ext cx="3943350" cy="1237192"/>
           </a:xfrm>
         </p:spPr>
         <p:txBody>
@@ -1524,18 +1341,13 @@
               <a:rPr lang="en-US"/>
               <a:t>Click to edit Master title style</a:t>
             </a:r>
-          </a:p>
-        </p:txBody>
-      </p:sp>
-      <p:sp>
-        <p:nvSpPr>
-          <p:cNvPr id="3" name="Text Placeholder 2">
-            <a:extLst>
-              <a:ext uri="{FF2B5EF4-FFF2-40B4-BE49-F238E27FC236}">
-                <a16:creationId xmlns:a16="http://schemas.microsoft.com/office/drawing/2014/main" id="{24722B0C-A16C-41E8-047D-A5D755684BC1}"/>
-              </a:ext>
-            </a:extLst>
-          </p:cNvPr>
+            <a:endParaRPr lang="en-US" dirty="0"/>
+          </a:p>
+        </p:txBody>
+      </p:sp>
+      <p:sp>
+        <p:nvSpPr>
+          <p:cNvPr id="3" name="Text Placeholder 2"/>
           <p:cNvSpPr>
             <a:spLocks noGrp="1"/>
           </p:cNvSpPr>
@@ -1545,8 +1357,8 @@
         </p:nvSpPr>
         <p:spPr>
           <a:xfrm>
-            <a:off x="839788" y="1681163"/>
-            <a:ext cx="5157787" cy="823912"/>
+            <a:off x="314921" y="1569085"/>
+            <a:ext cx="1934170" cy="768985"/>
           </a:xfrm>
         </p:spPr>
         <p:txBody>
@@ -1554,39 +1366,39 @@
           <a:lstStyle>
             <a:lvl1pPr marL="0" indent="0">
               <a:buNone/>
-              <a:defRPr sz="2400" b="1"/>
+              <a:defRPr sz="1200" b="1"/>
             </a:lvl1pPr>
-            <a:lvl2pPr marL="457200" indent="0">
-              <a:buNone/>
-              <a:defRPr sz="2000" b="1"/>
+            <a:lvl2pPr marL="228600" indent="0">
+              <a:buNone/>
+              <a:defRPr sz="1000" b="1"/>
             </a:lvl2pPr>
-            <a:lvl3pPr marL="914400" indent="0">
-              <a:buNone/>
-              <a:defRPr sz="1800" b="1"/>
+            <a:lvl3pPr marL="457200" indent="0">
+              <a:buNone/>
+              <a:defRPr sz="900" b="1"/>
             </a:lvl3pPr>
-            <a:lvl4pPr marL="1371600" indent="0">
-              <a:buNone/>
-              <a:defRPr sz="1600" b="1"/>
+            <a:lvl4pPr marL="685800" indent="0">
+              <a:buNone/>
+              <a:defRPr sz="800" b="1"/>
             </a:lvl4pPr>
-            <a:lvl5pPr marL="1828800" indent="0">
-              <a:buNone/>
-              <a:defRPr sz="1600" b="1"/>
+            <a:lvl5pPr marL="914400" indent="0">
+              <a:buNone/>
+              <a:defRPr sz="800" b="1"/>
             </a:lvl5pPr>
-            <a:lvl6pPr marL="2286000" indent="0">
-              <a:buNone/>
-              <a:defRPr sz="1600" b="1"/>
+            <a:lvl6pPr marL="1143000" indent="0">
+              <a:buNone/>
+              <a:defRPr sz="800" b="1"/>
             </a:lvl6pPr>
-            <a:lvl7pPr marL="2743200" indent="0">
-              <a:buNone/>
-              <a:defRPr sz="1600" b="1"/>
+            <a:lvl7pPr marL="1371600" indent="0">
+              <a:buNone/>
+              <a:defRPr sz="800" b="1"/>
             </a:lvl7pPr>
-            <a:lvl8pPr marL="3200400" indent="0">
-              <a:buNone/>
-              <a:defRPr sz="1600" b="1"/>
+            <a:lvl8pPr marL="1600200" indent="0">
+              <a:buNone/>
+              <a:defRPr sz="800" b="1"/>
             </a:lvl8pPr>
-            <a:lvl9pPr marL="3657600" indent="0">
-              <a:buNone/>
-              <a:defRPr sz="1600" b="1"/>
+            <a:lvl9pPr marL="1828800" indent="0">
+              <a:buNone/>
+              <a:defRPr sz="800" b="1"/>
             </a:lvl9pPr>
           </a:lstStyle>
           <a:p>
@@ -1600,13 +1412,7 @@
       </p:sp>
       <p:sp>
         <p:nvSpPr>
-          <p:cNvPr id="4" name="Content Placeholder 3">
-            <a:extLst>
-              <a:ext uri="{FF2B5EF4-FFF2-40B4-BE49-F238E27FC236}">
-                <a16:creationId xmlns:a16="http://schemas.microsoft.com/office/drawing/2014/main" id="{DB2C9CA5-7808-D698-6232-8FBA1CE20D97}"/>
-              </a:ext>
-            </a:extLst>
-          </p:cNvPr>
+          <p:cNvPr id="4" name="Content Placeholder 3"/>
           <p:cNvSpPr>
             <a:spLocks noGrp="1"/>
           </p:cNvSpPr>
@@ -1616,8 +1422,8 @@
         </p:nvSpPr>
         <p:spPr>
           <a:xfrm>
-            <a:off x="839788" y="2505075"/>
-            <a:ext cx="5157787" cy="3684588"/>
+            <a:off x="314921" y="2338070"/>
+            <a:ext cx="1934170" cy="3438949"/>
           </a:xfrm>
         </p:spPr>
         <p:txBody>
@@ -1657,18 +1463,13 @@
               <a:rPr lang="en-US"/>
               <a:t>Fifth level</a:t>
             </a:r>
-          </a:p>
-        </p:txBody>
-      </p:sp>
-      <p:sp>
-        <p:nvSpPr>
-          <p:cNvPr id="5" name="Text Placeholder 4">
-            <a:extLst>
-              <a:ext uri="{FF2B5EF4-FFF2-40B4-BE49-F238E27FC236}">
-                <a16:creationId xmlns:a16="http://schemas.microsoft.com/office/drawing/2014/main" id="{E06669E0-A58F-528F-A46E-E5B45258C85F}"/>
-              </a:ext>
-            </a:extLst>
-          </p:cNvPr>
+            <a:endParaRPr lang="en-US" dirty="0"/>
+          </a:p>
+        </p:txBody>
+      </p:sp>
+      <p:sp>
+        <p:nvSpPr>
+          <p:cNvPr id="5" name="Text Placeholder 4"/>
           <p:cNvSpPr>
             <a:spLocks noGrp="1"/>
           </p:cNvSpPr>
@@ -1678,8 +1479,8 @@
         </p:nvSpPr>
         <p:spPr>
           <a:xfrm>
-            <a:off x="6172200" y="1681163"/>
-            <a:ext cx="5183188" cy="823912"/>
+            <a:off x="2314575" y="1569085"/>
+            <a:ext cx="1943696" cy="768985"/>
           </a:xfrm>
         </p:spPr>
         <p:txBody>
@@ -1687,39 +1488,39 @@
           <a:lstStyle>
             <a:lvl1pPr marL="0" indent="0">
               <a:buNone/>
-              <a:defRPr sz="2400" b="1"/>
+              <a:defRPr sz="1200" b="1"/>
             </a:lvl1pPr>
-            <a:lvl2pPr marL="457200" indent="0">
-              <a:buNone/>
-              <a:defRPr sz="2000" b="1"/>
+            <a:lvl2pPr marL="228600" indent="0">
+              <a:buNone/>
+              <a:defRPr sz="1000" b="1"/>
             </a:lvl2pPr>
-            <a:lvl3pPr marL="914400" indent="0">
-              <a:buNone/>
-              <a:defRPr sz="1800" b="1"/>
+            <a:lvl3pPr marL="457200" indent="0">
+              <a:buNone/>
+              <a:defRPr sz="900" b="1"/>
             </a:lvl3pPr>
-            <a:lvl4pPr marL="1371600" indent="0">
-              <a:buNone/>
-              <a:defRPr sz="1600" b="1"/>
+            <a:lvl4pPr marL="685800" indent="0">
+              <a:buNone/>
+              <a:defRPr sz="800" b="1"/>
             </a:lvl4pPr>
-            <a:lvl5pPr marL="1828800" indent="0">
-              <a:buNone/>
-              <a:defRPr sz="1600" b="1"/>
+            <a:lvl5pPr marL="914400" indent="0">
+              <a:buNone/>
+              <a:defRPr sz="800" b="1"/>
             </a:lvl5pPr>
-            <a:lvl6pPr marL="2286000" indent="0">
-              <a:buNone/>
-              <a:defRPr sz="1600" b="1"/>
+            <a:lvl6pPr marL="1143000" indent="0">
+              <a:buNone/>
+              <a:defRPr sz="800" b="1"/>
             </a:lvl6pPr>
-            <a:lvl7pPr marL="2743200" indent="0">
-              <a:buNone/>
-              <a:defRPr sz="1600" b="1"/>
+            <a:lvl7pPr marL="1371600" indent="0">
+              <a:buNone/>
+              <a:defRPr sz="800" b="1"/>
             </a:lvl7pPr>
-            <a:lvl8pPr marL="3200400" indent="0">
-              <a:buNone/>
-              <a:defRPr sz="1600" b="1"/>
+            <a:lvl8pPr marL="1600200" indent="0">
+              <a:buNone/>
+              <a:defRPr sz="800" b="1"/>
             </a:lvl8pPr>
-            <a:lvl9pPr marL="3657600" indent="0">
-              <a:buNone/>
-              <a:defRPr sz="1600" b="1"/>
+            <a:lvl9pPr marL="1828800" indent="0">
+              <a:buNone/>
+              <a:defRPr sz="800" b="1"/>
             </a:lvl9pPr>
           </a:lstStyle>
           <a:p>
@@ -1733,13 +1534,7 @@
       </p:sp>
       <p:sp>
         <p:nvSpPr>
-          <p:cNvPr id="6" name="Content Placeholder 5">
-            <a:extLst>
-              <a:ext uri="{FF2B5EF4-FFF2-40B4-BE49-F238E27FC236}">
-                <a16:creationId xmlns:a16="http://schemas.microsoft.com/office/drawing/2014/main" id="{86352677-6CBE-A552-D01D-CBA2D906AB82}"/>
-              </a:ext>
-            </a:extLst>
-          </p:cNvPr>
+          <p:cNvPr id="6" name="Content Placeholder 5"/>
           <p:cNvSpPr>
             <a:spLocks noGrp="1"/>
           </p:cNvSpPr>
@@ -1749,8 +1544,8 @@
         </p:nvSpPr>
         <p:spPr>
           <a:xfrm>
-            <a:off x="6172200" y="2505075"/>
-            <a:ext cx="5183188" cy="3684588"/>
+            <a:off x="2314575" y="2338070"/>
+            <a:ext cx="1943696" cy="3438949"/>
           </a:xfrm>
         </p:spPr>
         <p:txBody>
@@ -1790,18 +1585,13 @@
               <a:rPr lang="en-US"/>
               <a:t>Fifth level</a:t>
             </a:r>
-          </a:p>
-        </p:txBody>
-      </p:sp>
-      <p:sp>
-        <p:nvSpPr>
-          <p:cNvPr id="7" name="Date Placeholder 6">
-            <a:extLst>
-              <a:ext uri="{FF2B5EF4-FFF2-40B4-BE49-F238E27FC236}">
-                <a16:creationId xmlns:a16="http://schemas.microsoft.com/office/drawing/2014/main" id="{451DFDF5-B0CC-4C63-DB4E-61670B8FC76D}"/>
-              </a:ext>
-            </a:extLst>
-          </p:cNvPr>
+            <a:endParaRPr lang="en-US" dirty="0"/>
+          </a:p>
+        </p:txBody>
+      </p:sp>
+      <p:sp>
+        <p:nvSpPr>
+          <p:cNvPr id="7" name="Date Placeholder 6"/>
           <p:cNvSpPr>
             <a:spLocks noGrp="1"/>
           </p:cNvSpPr>
@@ -1816,7 +1606,7 @@
           <a:p>
             <a:fld id="{7918679B-5683-0049-8DD0-2AC74A9489F6}" type="datetimeFigureOut">
               <a:rPr lang="en-US" smtClean="0"/>
-              <a:t>9/2/26</a:t>
+              <a:t>9/17/26</a:t>
             </a:fld>
             <a:endParaRPr lang="en-US"/>
           </a:p>
@@ -1824,13 +1614,7 @@
       </p:sp>
       <p:sp>
         <p:nvSpPr>
-          <p:cNvPr id="8" name="Footer Placeholder 7">
-            <a:extLst>
-              <a:ext uri="{FF2B5EF4-FFF2-40B4-BE49-F238E27FC236}">
-                <a16:creationId xmlns:a16="http://schemas.microsoft.com/office/drawing/2014/main" id="{B61B55FD-3BAB-FBDA-EB1E-69BABF7B8C5B}"/>
-              </a:ext>
-            </a:extLst>
-          </p:cNvPr>
+          <p:cNvPr id="8" name="Footer Placeholder 7"/>
           <p:cNvSpPr>
             <a:spLocks noGrp="1"/>
           </p:cNvSpPr>
@@ -1849,13 +1633,7 @@
       </p:sp>
       <p:sp>
         <p:nvSpPr>
-          <p:cNvPr id="9" name="Slide Number Placeholder 8">
-            <a:extLst>
-              <a:ext uri="{FF2B5EF4-FFF2-40B4-BE49-F238E27FC236}">
-                <a16:creationId xmlns:a16="http://schemas.microsoft.com/office/drawing/2014/main" id="{4774AA51-4BE2-6FD3-B8E0-FD230D20A432}"/>
-              </a:ext>
-            </a:extLst>
-          </p:cNvPr>
+          <p:cNvPr id="9" name="Slide Number Placeholder 8"/>
           <p:cNvSpPr>
             <a:spLocks noGrp="1"/>
           </p:cNvSpPr>
@@ -1879,7 +1657,7 @@
     </p:spTree>
     <p:extLst>
       <p:ext uri="{BB962C8B-B14F-4D97-AF65-F5344CB8AC3E}">
-        <p14:creationId xmlns:p14="http://schemas.microsoft.com/office/powerpoint/2010/main" val="441155319"/>
+        <p14:creationId xmlns:p14="http://schemas.microsoft.com/office/powerpoint/2010/main" val="1573317926"/>
       </p:ext>
     </p:extLst>
   </p:cSld>
@@ -1908,13 +1686,7 @@
       </p:grpSpPr>
       <p:sp>
         <p:nvSpPr>
-          <p:cNvPr id="2" name="Title 1">
-            <a:extLst>
-              <a:ext uri="{FF2B5EF4-FFF2-40B4-BE49-F238E27FC236}">
-                <a16:creationId xmlns:a16="http://schemas.microsoft.com/office/drawing/2014/main" id="{2273A989-0D4E-A0DF-2687-CA4919171B81}"/>
-              </a:ext>
-            </a:extLst>
-          </p:cNvPr>
+          <p:cNvPr id="2" name="Title 1"/>
           <p:cNvSpPr>
             <a:spLocks noGrp="1"/>
           </p:cNvSpPr>
@@ -1931,18 +1703,13 @@
               <a:rPr lang="en-US"/>
               <a:t>Click to edit Master title style</a:t>
             </a:r>
-          </a:p>
-        </p:txBody>
-      </p:sp>
-      <p:sp>
-        <p:nvSpPr>
-          <p:cNvPr id="3" name="Date Placeholder 2">
-            <a:extLst>
-              <a:ext uri="{FF2B5EF4-FFF2-40B4-BE49-F238E27FC236}">
-                <a16:creationId xmlns:a16="http://schemas.microsoft.com/office/drawing/2014/main" id="{21FAFD54-D8EB-A59A-1249-B5E8877BAD37}"/>
-              </a:ext>
-            </a:extLst>
-          </p:cNvPr>
+            <a:endParaRPr lang="en-US" dirty="0"/>
+          </a:p>
+        </p:txBody>
+      </p:sp>
+      <p:sp>
+        <p:nvSpPr>
+          <p:cNvPr id="3" name="Date Placeholder 2"/>
           <p:cNvSpPr>
             <a:spLocks noGrp="1"/>
           </p:cNvSpPr>
@@ -1957,7 +1724,7 @@
           <a:p>
             <a:fld id="{7918679B-5683-0049-8DD0-2AC74A9489F6}" type="datetimeFigureOut">
               <a:rPr lang="en-US" smtClean="0"/>
-              <a:t>9/2/26</a:t>
+              <a:t>9/17/26</a:t>
             </a:fld>
             <a:endParaRPr lang="en-US"/>
           </a:p>
@@ -1965,13 +1732,7 @@
       </p:sp>
       <p:sp>
         <p:nvSpPr>
-          <p:cNvPr id="4" name="Footer Placeholder 3">
-            <a:extLst>
-              <a:ext uri="{FF2B5EF4-FFF2-40B4-BE49-F238E27FC236}">
-                <a16:creationId xmlns:a16="http://schemas.microsoft.com/office/drawing/2014/main" id="{888D32D7-A110-F0FB-DEEC-D808D6112886}"/>
-              </a:ext>
-            </a:extLst>
-          </p:cNvPr>
+          <p:cNvPr id="4" name="Footer Placeholder 3"/>
           <p:cNvSpPr>
             <a:spLocks noGrp="1"/>
           </p:cNvSpPr>
@@ -1990,13 +1751,7 @@
       </p:sp>
       <p:sp>
         <p:nvSpPr>
-          <p:cNvPr id="5" name="Slide Number Placeholder 4">
-            <a:extLst>
-              <a:ext uri="{FF2B5EF4-FFF2-40B4-BE49-F238E27FC236}">
-                <a16:creationId xmlns:a16="http://schemas.microsoft.com/office/drawing/2014/main" id="{7E0489B2-64BB-9763-529C-FE4804869048}"/>
-              </a:ext>
-            </a:extLst>
-          </p:cNvPr>
+          <p:cNvPr id="5" name="Slide Number Placeholder 4"/>
           <p:cNvSpPr>
             <a:spLocks noGrp="1"/>
           </p:cNvSpPr>
@@ -2020,7 +1775,7 @@
     </p:spTree>
     <p:extLst>
       <p:ext uri="{BB962C8B-B14F-4D97-AF65-F5344CB8AC3E}">
-        <p14:creationId xmlns:p14="http://schemas.microsoft.com/office/powerpoint/2010/main" val="1637158597"/>
+        <p14:creationId xmlns:p14="http://schemas.microsoft.com/office/powerpoint/2010/main" val="3674315563"/>
       </p:ext>
     </p:extLst>
   </p:cSld>
@@ -2049,13 +1804,7 @@
       </p:grpSpPr>
       <p:sp>
         <p:nvSpPr>
-          <p:cNvPr id="2" name="Date Placeholder 1">
-            <a:extLst>
-              <a:ext uri="{FF2B5EF4-FFF2-40B4-BE49-F238E27FC236}">
-                <a16:creationId xmlns:a16="http://schemas.microsoft.com/office/drawing/2014/main" id="{FB791805-5E75-B7BC-A0FF-AD4E87D5C72A}"/>
-              </a:ext>
-            </a:extLst>
-          </p:cNvPr>
+          <p:cNvPr id="2" name="Date Placeholder 1"/>
           <p:cNvSpPr>
             <a:spLocks noGrp="1"/>
           </p:cNvSpPr>
@@ -2070,7 +1819,7 @@
           <a:p>
             <a:fld id="{7918679B-5683-0049-8DD0-2AC74A9489F6}" type="datetimeFigureOut">
               <a:rPr lang="en-US" smtClean="0"/>
-              <a:t>9/2/26</a:t>
+              <a:t>9/17/26</a:t>
             </a:fld>
             <a:endParaRPr lang="en-US"/>
           </a:p>
@@ -2078,13 +1827,7 @@
       </p:sp>
       <p:sp>
         <p:nvSpPr>
-          <p:cNvPr id="3" name="Footer Placeholder 2">
-            <a:extLst>
-              <a:ext uri="{FF2B5EF4-FFF2-40B4-BE49-F238E27FC236}">
-                <a16:creationId xmlns:a16="http://schemas.microsoft.com/office/drawing/2014/main" id="{148A7F30-F3C3-D25F-C906-E3952C20DEFB}"/>
-              </a:ext>
-            </a:extLst>
-          </p:cNvPr>
+          <p:cNvPr id="3" name="Footer Placeholder 2"/>
           <p:cNvSpPr>
             <a:spLocks noGrp="1"/>
           </p:cNvSpPr>
@@ -2103,13 +1846,7 @@
       </p:sp>
       <p:sp>
         <p:nvSpPr>
-          <p:cNvPr id="4" name="Slide Number Placeholder 3">
-            <a:extLst>
-              <a:ext uri="{FF2B5EF4-FFF2-40B4-BE49-F238E27FC236}">
-                <a16:creationId xmlns:a16="http://schemas.microsoft.com/office/drawing/2014/main" id="{ABEB0998-E9EB-3D2A-DB67-BFB0EA820070}"/>
-              </a:ext>
-            </a:extLst>
-          </p:cNvPr>
+          <p:cNvPr id="4" name="Slide Number Placeholder 3"/>
           <p:cNvSpPr>
             <a:spLocks noGrp="1"/>
           </p:cNvSpPr>
@@ -2133,7 +1870,7 @@
     </p:spTree>
     <p:extLst>
       <p:ext uri="{BB962C8B-B14F-4D97-AF65-F5344CB8AC3E}">
-        <p14:creationId xmlns:p14="http://schemas.microsoft.com/office/powerpoint/2010/main" val="353269581"/>
+        <p14:creationId xmlns:p14="http://schemas.microsoft.com/office/powerpoint/2010/main" val="1867432851"/>
       </p:ext>
     </p:extLst>
   </p:cSld>
@@ -2162,13 +1899,7 @@
       </p:grpSpPr>
       <p:sp>
         <p:nvSpPr>
-          <p:cNvPr id="2" name="Title 1">
-            <a:extLst>
-              <a:ext uri="{FF2B5EF4-FFF2-40B4-BE49-F238E27FC236}">
-                <a16:creationId xmlns:a16="http://schemas.microsoft.com/office/drawing/2014/main" id="{A6A607B4-30A5-280D-CF44-2F5128A8CD1F}"/>
-              </a:ext>
-            </a:extLst>
-          </p:cNvPr>
+          <p:cNvPr id="2" name="Title 1"/>
           <p:cNvSpPr>
             <a:spLocks noGrp="1"/>
           </p:cNvSpPr>
@@ -2178,15 +1909,15 @@
         </p:nvSpPr>
         <p:spPr>
           <a:xfrm>
-            <a:off x="839788" y="457200"/>
-            <a:ext cx="3932237" cy="1600200"/>
+            <a:off x="314921" y="426720"/>
+            <a:ext cx="1474589" cy="1493520"/>
           </a:xfrm>
         </p:spPr>
         <p:txBody>
           <a:bodyPr anchor="b"/>
           <a:lstStyle>
             <a:lvl1pPr>
-              <a:defRPr sz="3200"/>
+              <a:defRPr sz="1600"/>
             </a:lvl1pPr>
           </a:lstStyle>
           <a:p>
@@ -2194,18 +1925,13 @@
               <a:rPr lang="en-US"/>
               <a:t>Click to edit Master title style</a:t>
             </a:r>
-          </a:p>
-        </p:txBody>
-      </p:sp>
-      <p:sp>
-        <p:nvSpPr>
-          <p:cNvPr id="3" name="Content Placeholder 2">
-            <a:extLst>
-              <a:ext uri="{FF2B5EF4-FFF2-40B4-BE49-F238E27FC236}">
-                <a16:creationId xmlns:a16="http://schemas.microsoft.com/office/drawing/2014/main" id="{17FC0E30-9154-A8E2-3CBF-0FAA5CC64767}"/>
-              </a:ext>
-            </a:extLst>
-          </p:cNvPr>
+            <a:endParaRPr lang="en-US" dirty="0"/>
+          </a:p>
+        </p:txBody>
+      </p:sp>
+      <p:sp>
+        <p:nvSpPr>
+          <p:cNvPr id="3" name="Content Placeholder 2"/>
           <p:cNvSpPr>
             <a:spLocks noGrp="1"/>
           </p:cNvSpPr>
@@ -2215,137 +1941,38 @@
         </p:nvSpPr>
         <p:spPr>
           <a:xfrm>
-            <a:off x="5183188" y="987425"/>
-            <a:ext cx="6172200" cy="4873625"/>
+            <a:off x="1943695" y="921598"/>
+            <a:ext cx="2314575" cy="4548717"/>
           </a:xfrm>
         </p:spPr>
         <p:txBody>
           <a:bodyPr/>
           <a:lstStyle>
             <a:lvl1pPr>
-              <a:defRPr sz="3200"/>
+              <a:defRPr sz="1600"/>
             </a:lvl1pPr>
             <a:lvl2pPr>
-              <a:defRPr sz="2800"/>
+              <a:defRPr sz="1400"/>
             </a:lvl2pPr>
             <a:lvl3pPr>
-              <a:defRPr sz="2400"/>
+              <a:defRPr sz="1200"/>
             </a:lvl3pPr>
             <a:lvl4pPr>
-              <a:defRPr sz="2000"/>
+              <a:defRPr sz="1000"/>
             </a:lvl4pPr>
             <a:lvl5pPr>
-              <a:defRPr sz="2000"/>
+              <a:defRPr sz="1000"/>
             </a:lvl5pPr>
             <a:lvl6pPr>
-              <a:defRPr sz="2000"/>
+              <a:defRPr sz="1000"/>
             </a:lvl6pPr>
             <a:lvl7pPr>
-              <a:defRPr sz="2000"/>
+              <a:defRPr sz="1000"/>
             </a:lvl7pPr>
             <a:lvl8pPr>
-              <a:defRPr sz="2000"/>
+              <a:defRPr sz="1000"/>
             </a:lvl8pPr>
             <a:lvl9pPr>
-              <a:defRPr sz="2000"/>
-            </a:lvl9pPr>
-          </a:lstStyle>
-          <a:p>
-            <a:pPr lvl="0"/>
-            <a:r>
-              <a:rPr lang="en-US"/>
-              <a:t>Click to edit Master text styles</a:t>
-            </a:r>
-          </a:p>
-          <a:p>
-            <a:pPr lvl="1"/>
-            <a:r>
-              <a:rPr lang="en-US"/>
-              <a:t>Second level</a:t>
-            </a:r>
-          </a:p>
-          <a:p>
-            <a:pPr lvl="2"/>
-            <a:r>
-              <a:rPr lang="en-US"/>
-              <a:t>Third level</a:t>
-            </a:r>
-          </a:p>
-          <a:p>
-            <a:pPr lvl="3"/>
-            <a:r>
-              <a:rPr lang="en-US"/>
-              <a:t>Fourth level</a:t>
-            </a:r>
-          </a:p>
-          <a:p>
-            <a:pPr lvl="4"/>
-            <a:r>
-              <a:rPr lang="en-US"/>
-              <a:t>Fifth level</a:t>
-            </a:r>
-          </a:p>
-        </p:txBody>
-      </p:sp>
-      <p:sp>
-        <p:nvSpPr>
-          <p:cNvPr id="4" name="Text Placeholder 3">
-            <a:extLst>
-              <a:ext uri="{FF2B5EF4-FFF2-40B4-BE49-F238E27FC236}">
-                <a16:creationId xmlns:a16="http://schemas.microsoft.com/office/drawing/2014/main" id="{7724A923-7B1D-307B-36F4-279FE573F4DE}"/>
-              </a:ext>
-            </a:extLst>
-          </p:cNvPr>
-          <p:cNvSpPr>
-            <a:spLocks noGrp="1"/>
-          </p:cNvSpPr>
-          <p:nvPr>
-            <p:ph type="body" sz="half" idx="2"/>
-          </p:nvPr>
-        </p:nvSpPr>
-        <p:spPr>
-          <a:xfrm>
-            <a:off x="839788" y="2057400"/>
-            <a:ext cx="3932237" cy="3811588"/>
-          </a:xfrm>
-        </p:spPr>
-        <p:txBody>
-          <a:bodyPr/>
-          <a:lstStyle>
-            <a:lvl1pPr marL="0" indent="0">
-              <a:buNone/>
-              <a:defRPr sz="1600"/>
-            </a:lvl1pPr>
-            <a:lvl2pPr marL="457200" indent="0">
-              <a:buNone/>
-              <a:defRPr sz="1400"/>
-            </a:lvl2pPr>
-            <a:lvl3pPr marL="914400" indent="0">
-              <a:buNone/>
-              <a:defRPr sz="1200"/>
-            </a:lvl3pPr>
-            <a:lvl4pPr marL="1371600" indent="0">
-              <a:buNone/>
-              <a:defRPr sz="1000"/>
-            </a:lvl4pPr>
-            <a:lvl5pPr marL="1828800" indent="0">
-              <a:buNone/>
-              <a:defRPr sz="1000"/>
-            </a:lvl5pPr>
-            <a:lvl6pPr marL="2286000" indent="0">
-              <a:buNone/>
-              <a:defRPr sz="1000"/>
-            </a:lvl6pPr>
-            <a:lvl7pPr marL="2743200" indent="0">
-              <a:buNone/>
-              <a:defRPr sz="1000"/>
-            </a:lvl7pPr>
-            <a:lvl8pPr marL="3200400" indent="0">
-              <a:buNone/>
-              <a:defRPr sz="1000"/>
-            </a:lvl8pPr>
-            <a:lvl9pPr marL="3657600" indent="0">
-              <a:buNone/>
               <a:defRPr sz="1000"/>
             </a:lvl9pPr>
           </a:lstStyle>
@@ -2356,17 +1983,105 @@
               <a:t>Click to edit Master text styles</a:t>
             </a:r>
           </a:p>
-        </p:txBody>
-      </p:sp>
-      <p:sp>
-        <p:nvSpPr>
-          <p:cNvPr id="5" name="Date Placeholder 4">
-            <a:extLst>
-              <a:ext uri="{FF2B5EF4-FFF2-40B4-BE49-F238E27FC236}">
-                <a16:creationId xmlns:a16="http://schemas.microsoft.com/office/drawing/2014/main" id="{62F56A54-50A5-F4EC-ACF1-26062B951212}"/>
-              </a:ext>
-            </a:extLst>
-          </p:cNvPr>
+          <a:p>
+            <a:pPr lvl="1"/>
+            <a:r>
+              <a:rPr lang="en-US"/>
+              <a:t>Second level</a:t>
+            </a:r>
+          </a:p>
+          <a:p>
+            <a:pPr lvl="2"/>
+            <a:r>
+              <a:rPr lang="en-US"/>
+              <a:t>Third level</a:t>
+            </a:r>
+          </a:p>
+          <a:p>
+            <a:pPr lvl="3"/>
+            <a:r>
+              <a:rPr lang="en-US"/>
+              <a:t>Fourth level</a:t>
+            </a:r>
+          </a:p>
+          <a:p>
+            <a:pPr lvl="4"/>
+            <a:r>
+              <a:rPr lang="en-US"/>
+              <a:t>Fifth level</a:t>
+            </a:r>
+            <a:endParaRPr lang="en-US" dirty="0"/>
+          </a:p>
+        </p:txBody>
+      </p:sp>
+      <p:sp>
+        <p:nvSpPr>
+          <p:cNvPr id="4" name="Text Placeholder 3"/>
+          <p:cNvSpPr>
+            <a:spLocks noGrp="1"/>
+          </p:cNvSpPr>
+          <p:nvPr>
+            <p:ph type="body" sz="half" idx="2"/>
+          </p:nvPr>
+        </p:nvSpPr>
+        <p:spPr>
+          <a:xfrm>
+            <a:off x="314921" y="1920240"/>
+            <a:ext cx="1474589" cy="3557482"/>
+          </a:xfrm>
+        </p:spPr>
+        <p:txBody>
+          <a:bodyPr/>
+          <a:lstStyle>
+            <a:lvl1pPr marL="0" indent="0">
+              <a:buNone/>
+              <a:defRPr sz="800"/>
+            </a:lvl1pPr>
+            <a:lvl2pPr marL="228600" indent="0">
+              <a:buNone/>
+              <a:defRPr sz="700"/>
+            </a:lvl2pPr>
+            <a:lvl3pPr marL="457200" indent="0">
+              <a:buNone/>
+              <a:defRPr sz="600"/>
+            </a:lvl3pPr>
+            <a:lvl4pPr marL="685800" indent="0">
+              <a:buNone/>
+              <a:defRPr sz="500"/>
+            </a:lvl4pPr>
+            <a:lvl5pPr marL="914400" indent="0">
+              <a:buNone/>
+              <a:defRPr sz="500"/>
+            </a:lvl5pPr>
+            <a:lvl6pPr marL="1143000" indent="0">
+              <a:buNone/>
+              <a:defRPr sz="500"/>
+            </a:lvl6pPr>
+            <a:lvl7pPr marL="1371600" indent="0">
+              <a:buNone/>
+              <a:defRPr sz="500"/>
+            </a:lvl7pPr>
+            <a:lvl8pPr marL="1600200" indent="0">
+              <a:buNone/>
+              <a:defRPr sz="500"/>
+            </a:lvl8pPr>
+            <a:lvl9pPr marL="1828800" indent="0">
+              <a:buNone/>
+              <a:defRPr sz="500"/>
+            </a:lvl9pPr>
+          </a:lstStyle>
+          <a:p>
+            <a:pPr lvl="0"/>
+            <a:r>
+              <a:rPr lang="en-US"/>
+              <a:t>Click to edit Master text styles</a:t>
+            </a:r>
+          </a:p>
+        </p:txBody>
+      </p:sp>
+      <p:sp>
+        <p:nvSpPr>
+          <p:cNvPr id="5" name="Date Placeholder 4"/>
           <p:cNvSpPr>
             <a:spLocks noGrp="1"/>
           </p:cNvSpPr>
@@ -2381,7 +2096,7 @@
           <a:p>
             <a:fld id="{7918679B-5683-0049-8DD0-2AC74A9489F6}" type="datetimeFigureOut">
               <a:rPr lang="en-US" smtClean="0"/>
-              <a:t>9/2/26</a:t>
+              <a:t>9/17/26</a:t>
             </a:fld>
             <a:endParaRPr lang="en-US"/>
           </a:p>
@@ -2389,13 +2104,7 @@
       </p:sp>
       <p:sp>
         <p:nvSpPr>
-          <p:cNvPr id="6" name="Footer Placeholder 5">
-            <a:extLst>
-              <a:ext uri="{FF2B5EF4-FFF2-40B4-BE49-F238E27FC236}">
-                <a16:creationId xmlns:a16="http://schemas.microsoft.com/office/drawing/2014/main" id="{0CFF0EB8-940E-4D19-6089-7F8DD279DE6E}"/>
-              </a:ext>
-            </a:extLst>
-          </p:cNvPr>
+          <p:cNvPr id="6" name="Footer Placeholder 5"/>
           <p:cNvSpPr>
             <a:spLocks noGrp="1"/>
           </p:cNvSpPr>
@@ -2414,13 +2123,7 @@
       </p:sp>
       <p:sp>
         <p:nvSpPr>
-          <p:cNvPr id="7" name="Slide Number Placeholder 6">
-            <a:extLst>
-              <a:ext uri="{FF2B5EF4-FFF2-40B4-BE49-F238E27FC236}">
-                <a16:creationId xmlns:a16="http://schemas.microsoft.com/office/drawing/2014/main" id="{06A54DEF-3367-0C11-2F53-97DA2842C2C6}"/>
-              </a:ext>
-            </a:extLst>
-          </p:cNvPr>
+          <p:cNvPr id="7" name="Slide Number Placeholder 6"/>
           <p:cNvSpPr>
             <a:spLocks noGrp="1"/>
           </p:cNvSpPr>
@@ -2444,7 +2147,7 @@
     </p:spTree>
     <p:extLst>
       <p:ext uri="{BB962C8B-B14F-4D97-AF65-F5344CB8AC3E}">
-        <p14:creationId xmlns:p14="http://schemas.microsoft.com/office/powerpoint/2010/main" val="3580900404"/>
+        <p14:creationId xmlns:p14="http://schemas.microsoft.com/office/powerpoint/2010/main" val="1335960485"/>
       </p:ext>
     </p:extLst>
   </p:cSld>
@@ -2473,13 +2176,7 @@
       </p:grpSpPr>
       <p:sp>
         <p:nvSpPr>
-          <p:cNvPr id="2" name="Title 1">
-            <a:extLst>
-              <a:ext uri="{FF2B5EF4-FFF2-40B4-BE49-F238E27FC236}">
-                <a16:creationId xmlns:a16="http://schemas.microsoft.com/office/drawing/2014/main" id="{38396902-0541-690B-80BB-6D8A7A04DCAA}"/>
-              </a:ext>
-            </a:extLst>
-          </p:cNvPr>
+          <p:cNvPr id="2" name="Title 1"/>
           <p:cNvSpPr>
             <a:spLocks noGrp="1"/>
           </p:cNvSpPr>
@@ -2489,15 +2186,15 @@
         </p:nvSpPr>
         <p:spPr>
           <a:xfrm>
-            <a:off x="839788" y="457200"/>
-            <a:ext cx="3932237" cy="1600200"/>
+            <a:off x="314921" y="426720"/>
+            <a:ext cx="1474589" cy="1493520"/>
           </a:xfrm>
         </p:spPr>
         <p:txBody>
           <a:bodyPr anchor="b"/>
           <a:lstStyle>
             <a:lvl1pPr>
-              <a:defRPr sz="3200"/>
+              <a:defRPr sz="1600"/>
             </a:lvl1pPr>
           </a:lstStyle>
           <a:p>
@@ -2505,20 +2202,15 @@
               <a:rPr lang="en-US"/>
               <a:t>Click to edit Master title style</a:t>
             </a:r>
-          </a:p>
-        </p:txBody>
-      </p:sp>
-      <p:sp>
-        <p:nvSpPr>
-          <p:cNvPr id="3" name="Picture Placeholder 2">
-            <a:extLst>
-              <a:ext uri="{FF2B5EF4-FFF2-40B4-BE49-F238E27FC236}">
-                <a16:creationId xmlns:a16="http://schemas.microsoft.com/office/drawing/2014/main" id="{7FEA5946-FFA6-3E77-0161-F8A3959AF296}"/>
-              </a:ext>
-            </a:extLst>
-          </p:cNvPr>
-          <p:cNvSpPr>
-            <a:spLocks noGrp="1"/>
+            <a:endParaRPr lang="en-US" dirty="0"/>
+          </a:p>
+        </p:txBody>
+      </p:sp>
+      <p:sp>
+        <p:nvSpPr>
+          <p:cNvPr id="3" name="Picture Placeholder 2"/>
+          <p:cNvSpPr>
+            <a:spLocks noGrp="1" noChangeAspect="1"/>
           </p:cNvSpPr>
           <p:nvPr>
             <p:ph type="pic" idx="1"/>
@@ -2526,118 +2218,116 @@
         </p:nvSpPr>
         <p:spPr>
           <a:xfrm>
-            <a:off x="5183188" y="987425"/>
-            <a:ext cx="6172200" cy="4873625"/>
+            <a:off x="1943695" y="921598"/>
+            <a:ext cx="2314575" cy="4548717"/>
           </a:xfrm>
         </p:spPr>
         <p:txBody>
-          <a:bodyPr/>
+          <a:bodyPr anchor="t"/>
           <a:lstStyle>
             <a:lvl1pPr marL="0" indent="0">
               <a:buNone/>
-              <a:defRPr sz="3200"/>
-            </a:lvl1pPr>
-            <a:lvl2pPr marL="457200" indent="0">
-              <a:buNone/>
-              <a:defRPr sz="2800"/>
-            </a:lvl2pPr>
-            <a:lvl3pPr marL="914400" indent="0">
-              <a:buNone/>
-              <a:defRPr sz="2400"/>
-            </a:lvl3pPr>
-            <a:lvl4pPr marL="1371600" indent="0">
-              <a:buNone/>
-              <a:defRPr sz="2000"/>
-            </a:lvl4pPr>
-            <a:lvl5pPr marL="1828800" indent="0">
-              <a:buNone/>
-              <a:defRPr sz="2000"/>
-            </a:lvl5pPr>
-            <a:lvl6pPr marL="2286000" indent="0">
-              <a:buNone/>
-              <a:defRPr sz="2000"/>
-            </a:lvl6pPr>
-            <a:lvl7pPr marL="2743200" indent="0">
-              <a:buNone/>
-              <a:defRPr sz="2000"/>
-            </a:lvl7pPr>
-            <a:lvl8pPr marL="3200400" indent="0">
-              <a:buNone/>
-              <a:defRPr sz="2000"/>
-            </a:lvl8pPr>
-            <a:lvl9pPr marL="3657600" indent="0">
-              <a:buNone/>
-              <a:defRPr sz="2000"/>
-            </a:lvl9pPr>
-          </a:lstStyle>
-          <a:p>
-            <a:endParaRPr lang="en-US"/>
-          </a:p>
-        </p:txBody>
-      </p:sp>
-      <p:sp>
-        <p:nvSpPr>
-          <p:cNvPr id="4" name="Text Placeholder 3">
-            <a:extLst>
-              <a:ext uri="{FF2B5EF4-FFF2-40B4-BE49-F238E27FC236}">
-                <a16:creationId xmlns:a16="http://schemas.microsoft.com/office/drawing/2014/main" id="{E6DC5C0D-B124-16AC-4577-692A44FC69E0}"/>
-              </a:ext>
-            </a:extLst>
-          </p:cNvPr>
-          <p:cNvSpPr>
-            <a:spLocks noGrp="1"/>
-          </p:cNvSpPr>
-          <p:nvPr>
-            <p:ph type="body" sz="half" idx="2"/>
-          </p:nvPr>
-        </p:nvSpPr>
-        <p:spPr>
-          <a:xfrm>
-            <a:off x="839788" y="2057400"/>
-            <a:ext cx="3932237" cy="3811588"/>
-          </a:xfrm>
-        </p:spPr>
-        <p:txBody>
-          <a:bodyPr/>
-          <a:lstStyle>
-            <a:lvl1pPr marL="0" indent="0">
-              <a:buNone/>
               <a:defRPr sz="1600"/>
             </a:lvl1pPr>
-            <a:lvl2pPr marL="457200" indent="0">
+            <a:lvl2pPr marL="228600" indent="0">
               <a:buNone/>
               <a:defRPr sz="1400"/>
             </a:lvl2pPr>
-            <a:lvl3pPr marL="914400" indent="0">
+            <a:lvl3pPr marL="457200" indent="0">
               <a:buNone/>
               <a:defRPr sz="1200"/>
             </a:lvl3pPr>
-            <a:lvl4pPr marL="1371600" indent="0">
+            <a:lvl4pPr marL="685800" indent="0">
               <a:buNone/>
               <a:defRPr sz="1000"/>
             </a:lvl4pPr>
-            <a:lvl5pPr marL="1828800" indent="0">
+            <a:lvl5pPr marL="914400" indent="0">
               <a:buNone/>
               <a:defRPr sz="1000"/>
             </a:lvl5pPr>
-            <a:lvl6pPr marL="2286000" indent="0">
+            <a:lvl6pPr marL="1143000" indent="0">
               <a:buNone/>
               <a:defRPr sz="1000"/>
             </a:lvl6pPr>
-            <a:lvl7pPr marL="2743200" indent="0">
+            <a:lvl7pPr marL="1371600" indent="0">
               <a:buNone/>
               <a:defRPr sz="1000"/>
             </a:lvl7pPr>
-            <a:lvl8pPr marL="3200400" indent="0">
+            <a:lvl8pPr marL="1600200" indent="0">
               <a:buNone/>
               <a:defRPr sz="1000"/>
             </a:lvl8pPr>
-            <a:lvl9pPr marL="3657600" indent="0">
+            <a:lvl9pPr marL="1828800" indent="0">
               <a:buNone/>
               <a:defRPr sz="1000"/>
             </a:lvl9pPr>
           </a:lstStyle>
           <a:p>
+            <a:r>
+              <a:rPr lang="en-US"/>
+              <a:t>Click icon to add picture</a:t>
+            </a:r>
+            <a:endParaRPr lang="en-US" dirty="0"/>
+          </a:p>
+        </p:txBody>
+      </p:sp>
+      <p:sp>
+        <p:nvSpPr>
+          <p:cNvPr id="4" name="Text Placeholder 3"/>
+          <p:cNvSpPr>
+            <a:spLocks noGrp="1"/>
+          </p:cNvSpPr>
+          <p:nvPr>
+            <p:ph type="body" sz="half" idx="2"/>
+          </p:nvPr>
+        </p:nvSpPr>
+        <p:spPr>
+          <a:xfrm>
+            <a:off x="314921" y="1920240"/>
+            <a:ext cx="1474589" cy="3557482"/>
+          </a:xfrm>
+        </p:spPr>
+        <p:txBody>
+          <a:bodyPr/>
+          <a:lstStyle>
+            <a:lvl1pPr marL="0" indent="0">
+              <a:buNone/>
+              <a:defRPr sz="800"/>
+            </a:lvl1pPr>
+            <a:lvl2pPr marL="228600" indent="0">
+              <a:buNone/>
+              <a:defRPr sz="700"/>
+            </a:lvl2pPr>
+            <a:lvl3pPr marL="457200" indent="0">
+              <a:buNone/>
+              <a:defRPr sz="600"/>
+            </a:lvl3pPr>
+            <a:lvl4pPr marL="685800" indent="0">
+              <a:buNone/>
+              <a:defRPr sz="500"/>
+            </a:lvl4pPr>
+            <a:lvl5pPr marL="914400" indent="0">
+              <a:buNone/>
+              <a:defRPr sz="500"/>
+            </a:lvl5pPr>
+            <a:lvl6pPr marL="1143000" indent="0">
+              <a:buNone/>
+              <a:defRPr sz="500"/>
+            </a:lvl6pPr>
+            <a:lvl7pPr marL="1371600" indent="0">
+              <a:buNone/>
+              <a:defRPr sz="500"/>
+            </a:lvl7pPr>
+            <a:lvl8pPr marL="1600200" indent="0">
+              <a:buNone/>
+              <a:defRPr sz="500"/>
+            </a:lvl8pPr>
+            <a:lvl9pPr marL="1828800" indent="0">
+              <a:buNone/>
+              <a:defRPr sz="500"/>
+            </a:lvl9pPr>
+          </a:lstStyle>
+          <a:p>
             <a:pPr lvl="0"/>
             <a:r>
               <a:rPr lang="en-US"/>
@@ -2648,13 +2338,7 @@
       </p:sp>
       <p:sp>
         <p:nvSpPr>
-          <p:cNvPr id="5" name="Date Placeholder 4">
-            <a:extLst>
-              <a:ext uri="{FF2B5EF4-FFF2-40B4-BE49-F238E27FC236}">
-                <a16:creationId xmlns:a16="http://schemas.microsoft.com/office/drawing/2014/main" id="{3FA59E43-2266-1036-5F1F-179AB3BE1B43}"/>
-              </a:ext>
-            </a:extLst>
-          </p:cNvPr>
+          <p:cNvPr id="5" name="Date Placeholder 4"/>
           <p:cNvSpPr>
             <a:spLocks noGrp="1"/>
           </p:cNvSpPr>
@@ -2669,7 +2353,7 @@
           <a:p>
             <a:fld id="{7918679B-5683-0049-8DD0-2AC74A9489F6}" type="datetimeFigureOut">
               <a:rPr lang="en-US" smtClean="0"/>
-              <a:t>9/2/26</a:t>
+              <a:t>9/17/26</a:t>
             </a:fld>
             <a:endParaRPr lang="en-US"/>
           </a:p>
@@ -2677,13 +2361,7 @@
       </p:sp>
       <p:sp>
         <p:nvSpPr>
-          <p:cNvPr id="6" name="Footer Placeholder 5">
-            <a:extLst>
-              <a:ext uri="{FF2B5EF4-FFF2-40B4-BE49-F238E27FC236}">
-                <a16:creationId xmlns:a16="http://schemas.microsoft.com/office/drawing/2014/main" id="{7E071A8B-E8FB-E765-7C58-9857BF4D91D9}"/>
-              </a:ext>
-            </a:extLst>
-          </p:cNvPr>
+          <p:cNvPr id="6" name="Footer Placeholder 5"/>
           <p:cNvSpPr>
             <a:spLocks noGrp="1"/>
           </p:cNvSpPr>
@@ -2702,13 +2380,7 @@
       </p:sp>
       <p:sp>
         <p:nvSpPr>
-          <p:cNvPr id="7" name="Slide Number Placeholder 6">
-            <a:extLst>
-              <a:ext uri="{FF2B5EF4-FFF2-40B4-BE49-F238E27FC236}">
-                <a16:creationId xmlns:a16="http://schemas.microsoft.com/office/drawing/2014/main" id="{0616470D-7946-2344-C057-61A477352D7D}"/>
-              </a:ext>
-            </a:extLst>
-          </p:cNvPr>
+          <p:cNvPr id="7" name="Slide Number Placeholder 6"/>
           <p:cNvSpPr>
             <a:spLocks noGrp="1"/>
           </p:cNvSpPr>
@@ -2732,7 +2404,7 @@
     </p:spTree>
     <p:extLst>
       <p:ext uri="{BB962C8B-B14F-4D97-AF65-F5344CB8AC3E}">
-        <p14:creationId xmlns:p14="http://schemas.microsoft.com/office/powerpoint/2010/main" val="3520274662"/>
+        <p14:creationId xmlns:p14="http://schemas.microsoft.com/office/powerpoint/2010/main" val="2734404651"/>
       </p:ext>
     </p:extLst>
   </p:cSld>
@@ -2766,13 +2438,7 @@
       </p:grpSpPr>
       <p:sp>
         <p:nvSpPr>
-          <p:cNvPr id="2" name="Title Placeholder 1">
-            <a:extLst>
-              <a:ext uri="{FF2B5EF4-FFF2-40B4-BE49-F238E27FC236}">
-                <a16:creationId xmlns:a16="http://schemas.microsoft.com/office/drawing/2014/main" id="{172E10E1-2CD0-6134-1718-4707DBE90CBD}"/>
-              </a:ext>
-            </a:extLst>
-          </p:cNvPr>
+          <p:cNvPr id="2" name="Title Placeholder 1"/>
           <p:cNvSpPr>
             <a:spLocks noGrp="1"/>
           </p:cNvSpPr>
@@ -2782,8 +2448,8 @@
         </p:nvSpPr>
         <p:spPr>
           <a:xfrm>
-            <a:off x="838200" y="365125"/>
-            <a:ext cx="10515600" cy="1325563"/>
+            <a:off x="314325" y="340785"/>
+            <a:ext cx="3943350" cy="1237192"/>
           </a:xfrm>
           <a:prstGeom prst="rect">
             <a:avLst/>
@@ -2799,18 +2465,13 @@
               <a:rPr lang="en-US"/>
               <a:t>Click to edit Master title style</a:t>
             </a:r>
-          </a:p>
-        </p:txBody>
-      </p:sp>
-      <p:sp>
-        <p:nvSpPr>
-          <p:cNvPr id="3" name="Text Placeholder 2">
-            <a:extLst>
-              <a:ext uri="{FF2B5EF4-FFF2-40B4-BE49-F238E27FC236}">
-                <a16:creationId xmlns:a16="http://schemas.microsoft.com/office/drawing/2014/main" id="{CA3CD29A-641B-96CB-5DED-378E55A68F8B}"/>
-              </a:ext>
-            </a:extLst>
-          </p:cNvPr>
+            <a:endParaRPr lang="en-US" dirty="0"/>
+          </a:p>
+        </p:txBody>
+      </p:sp>
+      <p:sp>
+        <p:nvSpPr>
+          <p:cNvPr id="3" name="Text Placeholder 2"/>
           <p:cNvSpPr>
             <a:spLocks noGrp="1"/>
           </p:cNvSpPr>
@@ -2820,8 +2481,8 @@
         </p:nvSpPr>
         <p:spPr>
           <a:xfrm>
-            <a:off x="838200" y="1825625"/>
-            <a:ext cx="10515600" cy="4351338"/>
+            <a:off x="314325" y="1703917"/>
+            <a:ext cx="3943350" cy="4061249"/>
           </a:xfrm>
           <a:prstGeom prst="rect">
             <a:avLst/>
@@ -2866,18 +2527,13 @@
               <a:rPr lang="en-US"/>
               <a:t>Fifth level</a:t>
             </a:r>
-          </a:p>
-        </p:txBody>
-      </p:sp>
-      <p:sp>
-        <p:nvSpPr>
-          <p:cNvPr id="4" name="Date Placeholder 3">
-            <a:extLst>
-              <a:ext uri="{FF2B5EF4-FFF2-40B4-BE49-F238E27FC236}">
-                <a16:creationId xmlns:a16="http://schemas.microsoft.com/office/drawing/2014/main" id="{87E44F4D-C74B-15B4-334C-9D7ECF07AD83}"/>
-              </a:ext>
-            </a:extLst>
-          </p:cNvPr>
+            <a:endParaRPr lang="en-US" dirty="0"/>
+          </a:p>
+        </p:txBody>
+      </p:sp>
+      <p:sp>
+        <p:nvSpPr>
+          <p:cNvPr id="4" name="Date Placeholder 3"/>
           <p:cNvSpPr>
             <a:spLocks noGrp="1"/>
           </p:cNvSpPr>
@@ -2887,8 +2543,8 @@
         </p:nvSpPr>
         <p:spPr>
           <a:xfrm>
-            <a:off x="838200" y="6356350"/>
-            <a:ext cx="2743200" cy="365125"/>
+            <a:off x="314325" y="5932595"/>
+            <a:ext cx="1028700" cy="340783"/>
           </a:xfrm>
           <a:prstGeom prst="rect">
             <a:avLst/>
@@ -2898,7 +2554,7 @@
           <a:bodyPr vert="horz" lIns="91440" tIns="45720" rIns="91440" bIns="45720" rtlCol="0" anchor="ctr"/>
           <a:lstStyle>
             <a:lvl1pPr algn="l">
-              <a:defRPr sz="1200">
+              <a:defRPr sz="600">
                 <a:solidFill>
                   <a:schemeClr val="tx1">
                     <a:tint val="75000"/>
@@ -2910,7 +2566,7 @@
           <a:p>
             <a:fld id="{7918679B-5683-0049-8DD0-2AC74A9489F6}" type="datetimeFigureOut">
               <a:rPr lang="en-US" smtClean="0"/>
-              <a:t>9/2/26</a:t>
+              <a:t>9/17/26</a:t>
             </a:fld>
             <a:endParaRPr lang="en-US"/>
           </a:p>
@@ -2918,13 +2574,7 @@
       </p:sp>
       <p:sp>
         <p:nvSpPr>
-          <p:cNvPr id="5" name="Footer Placeholder 4">
-            <a:extLst>
-              <a:ext uri="{FF2B5EF4-FFF2-40B4-BE49-F238E27FC236}">
-                <a16:creationId xmlns:a16="http://schemas.microsoft.com/office/drawing/2014/main" id="{2D47C02D-F804-B593-0CCF-33F4969D3CFF}"/>
-              </a:ext>
-            </a:extLst>
-          </p:cNvPr>
+          <p:cNvPr id="5" name="Footer Placeholder 4"/>
           <p:cNvSpPr>
             <a:spLocks noGrp="1"/>
           </p:cNvSpPr>
@@ -2934,8 +2584,8 @@
         </p:nvSpPr>
         <p:spPr>
           <a:xfrm>
-            <a:off x="4038600" y="6356350"/>
-            <a:ext cx="4114800" cy="365125"/>
+            <a:off x="1514475" y="5932595"/>
+            <a:ext cx="1543050" cy="340783"/>
           </a:xfrm>
           <a:prstGeom prst="rect">
             <a:avLst/>
@@ -2945,7 +2595,7 @@
           <a:bodyPr vert="horz" lIns="91440" tIns="45720" rIns="91440" bIns="45720" rtlCol="0" anchor="ctr"/>
           <a:lstStyle>
             <a:lvl1pPr algn="ctr">
-              <a:defRPr sz="1200">
+              <a:defRPr sz="600">
                 <a:solidFill>
                   <a:schemeClr val="tx1">
                     <a:tint val="75000"/>
@@ -2961,13 +2611,7 @@
       </p:sp>
       <p:sp>
         <p:nvSpPr>
-          <p:cNvPr id="6" name="Slide Number Placeholder 5">
-            <a:extLst>
-              <a:ext uri="{FF2B5EF4-FFF2-40B4-BE49-F238E27FC236}">
-                <a16:creationId xmlns:a16="http://schemas.microsoft.com/office/drawing/2014/main" id="{4FE1DCE0-F383-786D-AE7D-8B8D24D229F8}"/>
-              </a:ext>
-            </a:extLst>
-          </p:cNvPr>
+          <p:cNvPr id="6" name="Slide Number Placeholder 5"/>
           <p:cNvSpPr>
             <a:spLocks noGrp="1"/>
           </p:cNvSpPr>
@@ -2977,8 +2621,8 @@
         </p:nvSpPr>
         <p:spPr>
           <a:xfrm>
-            <a:off x="8610600" y="6356350"/>
-            <a:ext cx="2743200" cy="365125"/>
+            <a:off x="3228975" y="5932595"/>
+            <a:ext cx="1028700" cy="340783"/>
           </a:xfrm>
           <a:prstGeom prst="rect">
             <a:avLst/>
@@ -2988,7 +2632,7 @@
           <a:bodyPr vert="horz" lIns="91440" tIns="45720" rIns="91440" bIns="45720" rtlCol="0" anchor="ctr"/>
           <a:lstStyle>
             <a:lvl1pPr algn="r">
-              <a:defRPr sz="1200">
+              <a:defRPr sz="600">
                 <a:solidFill>
                   <a:schemeClr val="tx1">
                     <a:tint val="75000"/>
@@ -3009,27 +2653,27 @@
     </p:spTree>
     <p:extLst>
       <p:ext uri="{BB962C8B-B14F-4D97-AF65-F5344CB8AC3E}">
-        <p14:creationId xmlns:p14="http://schemas.microsoft.com/office/powerpoint/2010/main" val="2412661014"/>
+        <p14:creationId xmlns:p14="http://schemas.microsoft.com/office/powerpoint/2010/main" val="3763850998"/>
       </p:ext>
     </p:extLst>
   </p:cSld>
   <p:clrMap bg1="lt1" tx1="dk1" bg2="lt2" tx2="dk2" accent1="accent1" accent2="accent2" accent3="accent3" accent4="accent4" accent5="accent5" accent6="accent6" hlink="hlink" folHlink="folHlink"/>
   <p:sldLayoutIdLst>
-    <p:sldLayoutId id="2147483649" r:id="rId1"/>
-    <p:sldLayoutId id="2147483650" r:id="rId2"/>
-    <p:sldLayoutId id="2147483651" r:id="rId3"/>
-    <p:sldLayoutId id="2147483652" r:id="rId4"/>
-    <p:sldLayoutId id="2147483653" r:id="rId5"/>
-    <p:sldLayoutId id="2147483654" r:id="rId6"/>
-    <p:sldLayoutId id="2147483655" r:id="rId7"/>
-    <p:sldLayoutId id="2147483656" r:id="rId8"/>
-    <p:sldLayoutId id="2147483657" r:id="rId9"/>
-    <p:sldLayoutId id="2147483658" r:id="rId10"/>
-    <p:sldLayoutId id="2147483659" r:id="rId11"/>
+    <p:sldLayoutId id="2147483709" r:id="rId1"/>
+    <p:sldLayoutId id="2147483710" r:id="rId2"/>
+    <p:sldLayoutId id="2147483711" r:id="rId3"/>
+    <p:sldLayoutId id="2147483712" r:id="rId4"/>
+    <p:sldLayoutId id="2147483713" r:id="rId5"/>
+    <p:sldLayoutId id="2147483714" r:id="rId6"/>
+    <p:sldLayoutId id="2147483715" r:id="rId7"/>
+    <p:sldLayoutId id="2147483716" r:id="rId8"/>
+    <p:sldLayoutId id="2147483717" r:id="rId9"/>
+    <p:sldLayoutId id="2147483718" r:id="rId10"/>
+    <p:sldLayoutId id="2147483719" r:id="rId11"/>
   </p:sldLayoutIdLst>
   <p:txStyles>
     <p:titleStyle>
-      <a:lvl1pPr algn="l" defTabSz="914400" rtl="0" eaLnBrk="1" latinLnBrk="0" hangingPunct="1">
+      <a:lvl1pPr algn="l" defTabSz="457200" rtl="0" eaLnBrk="1" latinLnBrk="0" hangingPunct="1">
         <a:lnSpc>
           <a:spcPct val="90000"/>
         </a:lnSpc>
@@ -3037,7 +2681,7 @@
           <a:spcPct val="0"/>
         </a:spcBef>
         <a:buNone/>
-        <a:defRPr sz="4400" kern="1200">
+        <a:defRPr sz="2200" kern="1200">
           <a:solidFill>
             <a:schemeClr val="tx1"/>
           </a:solidFill>
@@ -3048,16 +2692,16 @@
       </a:lvl1pPr>
     </p:titleStyle>
     <p:bodyStyle>
-      <a:lvl1pPr marL="228600" indent="-228600" algn="l" defTabSz="914400" rtl="0" eaLnBrk="1" latinLnBrk="0" hangingPunct="1">
+      <a:lvl1pPr marL="114300" indent="-114300" algn="l" defTabSz="457200" rtl="0" eaLnBrk="1" latinLnBrk="0" hangingPunct="1">
         <a:lnSpc>
           <a:spcPct val="90000"/>
         </a:lnSpc>
         <a:spcBef>
-          <a:spcPts val="1000"/>
+          <a:spcPts val="500"/>
         </a:spcBef>
         <a:buFont typeface="Arial" panose="020B0604020202020204" pitchFamily="34" charset="0"/>
         <a:buChar char="•"/>
-        <a:defRPr sz="2800" kern="1200">
+        <a:defRPr sz="1400" kern="1200">
           <a:solidFill>
             <a:schemeClr val="tx1"/>
           </a:solidFill>
@@ -3066,16 +2710,16 @@
           <a:cs typeface="+mn-cs"/>
         </a:defRPr>
       </a:lvl1pPr>
-      <a:lvl2pPr marL="685800" indent="-228600" algn="l" defTabSz="914400" rtl="0" eaLnBrk="1" latinLnBrk="0" hangingPunct="1">
+      <a:lvl2pPr marL="342900" indent="-114300" algn="l" defTabSz="457200" rtl="0" eaLnBrk="1" latinLnBrk="0" hangingPunct="1">
         <a:lnSpc>
           <a:spcPct val="90000"/>
         </a:lnSpc>
         <a:spcBef>
-          <a:spcPts val="500"/>
+          <a:spcPts val="250"/>
         </a:spcBef>
         <a:buFont typeface="Arial" panose="020B0604020202020204" pitchFamily="34" charset="0"/>
         <a:buChar char="•"/>
-        <a:defRPr sz="2400" kern="1200">
+        <a:defRPr sz="1200" kern="1200">
           <a:solidFill>
             <a:schemeClr val="tx1"/>
           </a:solidFill>
@@ -3084,16 +2728,16 @@
           <a:cs typeface="+mn-cs"/>
         </a:defRPr>
       </a:lvl2pPr>
-      <a:lvl3pPr marL="1143000" indent="-228600" algn="l" defTabSz="914400" rtl="0" eaLnBrk="1" latinLnBrk="0" hangingPunct="1">
+      <a:lvl3pPr marL="571500" indent="-114300" algn="l" defTabSz="457200" rtl="0" eaLnBrk="1" latinLnBrk="0" hangingPunct="1">
         <a:lnSpc>
           <a:spcPct val="90000"/>
         </a:lnSpc>
         <a:spcBef>
-          <a:spcPts val="500"/>
+          <a:spcPts val="250"/>
         </a:spcBef>
         <a:buFont typeface="Arial" panose="020B0604020202020204" pitchFamily="34" charset="0"/>
         <a:buChar char="•"/>
-        <a:defRPr sz="2000" kern="1200">
+        <a:defRPr sz="1000" kern="1200">
           <a:solidFill>
             <a:schemeClr val="tx1"/>
           </a:solidFill>
@@ -3102,16 +2746,16 @@
           <a:cs typeface="+mn-cs"/>
         </a:defRPr>
       </a:lvl3pPr>
-      <a:lvl4pPr marL="1600200" indent="-228600" algn="l" defTabSz="914400" rtl="0" eaLnBrk="1" latinLnBrk="0" hangingPunct="1">
+      <a:lvl4pPr marL="800100" indent="-114300" algn="l" defTabSz="457200" rtl="0" eaLnBrk="1" latinLnBrk="0" hangingPunct="1">
         <a:lnSpc>
           <a:spcPct val="90000"/>
         </a:lnSpc>
         <a:spcBef>
-          <a:spcPts val="500"/>
+          <a:spcPts val="250"/>
         </a:spcBef>
         <a:buFont typeface="Arial" panose="020B0604020202020204" pitchFamily="34" charset="0"/>
         <a:buChar char="•"/>
-        <a:defRPr sz="1800" kern="1200">
+        <a:defRPr sz="900" kern="1200">
           <a:solidFill>
             <a:schemeClr val="tx1"/>
           </a:solidFill>
@@ -3120,16 +2764,16 @@
           <a:cs typeface="+mn-cs"/>
         </a:defRPr>
       </a:lvl4pPr>
-      <a:lvl5pPr marL="2057400" indent="-228600" algn="l" defTabSz="914400" rtl="0" eaLnBrk="1" latinLnBrk="0" hangingPunct="1">
+      <a:lvl5pPr marL="1028700" indent="-114300" algn="l" defTabSz="457200" rtl="0" eaLnBrk="1" latinLnBrk="0" hangingPunct="1">
         <a:lnSpc>
           <a:spcPct val="90000"/>
         </a:lnSpc>
         <a:spcBef>
-          <a:spcPts val="500"/>
+          <a:spcPts val="250"/>
         </a:spcBef>
         <a:buFont typeface="Arial" panose="020B0604020202020204" pitchFamily="34" charset="0"/>
         <a:buChar char="•"/>
-        <a:defRPr sz="1800" kern="1200">
+        <a:defRPr sz="900" kern="1200">
           <a:solidFill>
             <a:schemeClr val="tx1"/>
           </a:solidFill>
@@ -3138,16 +2782,16 @@
           <a:cs typeface="+mn-cs"/>
         </a:defRPr>
       </a:lvl5pPr>
-      <a:lvl6pPr marL="2514600" indent="-228600" algn="l" defTabSz="914400" rtl="0" eaLnBrk="1" latinLnBrk="0" hangingPunct="1">
+      <a:lvl6pPr marL="1257300" indent="-114300" algn="l" defTabSz="457200" rtl="0" eaLnBrk="1" latinLnBrk="0" hangingPunct="1">
         <a:lnSpc>
           <a:spcPct val="90000"/>
         </a:lnSpc>
         <a:spcBef>
-          <a:spcPts val="500"/>
+          <a:spcPts val="250"/>
         </a:spcBef>
         <a:buFont typeface="Arial" panose="020B0604020202020204" pitchFamily="34" charset="0"/>
         <a:buChar char="•"/>
-        <a:defRPr sz="1800" kern="1200">
+        <a:defRPr sz="900" kern="1200">
           <a:solidFill>
             <a:schemeClr val="tx1"/>
           </a:solidFill>
@@ -3156,16 +2800,16 @@
           <a:cs typeface="+mn-cs"/>
         </a:defRPr>
       </a:lvl6pPr>
-      <a:lvl7pPr marL="2971800" indent="-228600" algn="l" defTabSz="914400" rtl="0" eaLnBrk="1" latinLnBrk="0" hangingPunct="1">
+      <a:lvl7pPr marL="1485900" indent="-114300" algn="l" defTabSz="457200" rtl="0" eaLnBrk="1" latinLnBrk="0" hangingPunct="1">
         <a:lnSpc>
           <a:spcPct val="90000"/>
         </a:lnSpc>
         <a:spcBef>
-          <a:spcPts val="500"/>
+          <a:spcPts val="250"/>
         </a:spcBef>
         <a:buFont typeface="Arial" panose="020B0604020202020204" pitchFamily="34" charset="0"/>
         <a:buChar char="•"/>
-        <a:defRPr sz="1800" kern="1200">
+        <a:defRPr sz="900" kern="1200">
           <a:solidFill>
             <a:schemeClr val="tx1"/>
           </a:solidFill>
@@ -3174,16 +2818,16 @@
           <a:cs typeface="+mn-cs"/>
         </a:defRPr>
       </a:lvl7pPr>
-      <a:lvl8pPr marL="3429000" indent="-228600" algn="l" defTabSz="914400" rtl="0" eaLnBrk="1" latinLnBrk="0" hangingPunct="1">
+      <a:lvl8pPr marL="1714500" indent="-114300" algn="l" defTabSz="457200" rtl="0" eaLnBrk="1" latinLnBrk="0" hangingPunct="1">
         <a:lnSpc>
           <a:spcPct val="90000"/>
         </a:lnSpc>
         <a:spcBef>
-          <a:spcPts val="500"/>
+          <a:spcPts val="250"/>
         </a:spcBef>
         <a:buFont typeface="Arial" panose="020B0604020202020204" pitchFamily="34" charset="0"/>
         <a:buChar char="•"/>
-        <a:defRPr sz="1800" kern="1200">
+        <a:defRPr sz="900" kern="1200">
           <a:solidFill>
             <a:schemeClr val="tx1"/>
           </a:solidFill>
@@ -3192,16 +2836,16 @@
           <a:cs typeface="+mn-cs"/>
         </a:defRPr>
       </a:lvl8pPr>
-      <a:lvl9pPr marL="3886200" indent="-228600" algn="l" defTabSz="914400" rtl="0" eaLnBrk="1" latinLnBrk="0" hangingPunct="1">
+      <a:lvl9pPr marL="1943100" indent="-114300" algn="l" defTabSz="457200" rtl="0" eaLnBrk="1" latinLnBrk="0" hangingPunct="1">
         <a:lnSpc>
           <a:spcPct val="90000"/>
         </a:lnSpc>
         <a:spcBef>
-          <a:spcPts val="500"/>
+          <a:spcPts val="250"/>
         </a:spcBef>
         <a:buFont typeface="Arial" panose="020B0604020202020204" pitchFamily="34" charset="0"/>
         <a:buChar char="•"/>
-        <a:defRPr sz="1800" kern="1200">
+        <a:defRPr sz="900" kern="1200">
           <a:solidFill>
             <a:schemeClr val="tx1"/>
           </a:solidFill>
@@ -3215,8 +2859,8 @@
       <a:defPPr>
         <a:defRPr lang="en-US"/>
       </a:defPPr>
-      <a:lvl1pPr marL="0" algn="l" defTabSz="914400" rtl="0" eaLnBrk="1" latinLnBrk="0" hangingPunct="1">
-        <a:defRPr sz="1800" kern="1200">
+      <a:lvl1pPr marL="0" algn="l" defTabSz="457200" rtl="0" eaLnBrk="1" latinLnBrk="0" hangingPunct="1">
+        <a:defRPr sz="900" kern="1200">
           <a:solidFill>
             <a:schemeClr val="tx1"/>
           </a:solidFill>
@@ -3225,8 +2869,8 @@
           <a:cs typeface="+mn-cs"/>
         </a:defRPr>
       </a:lvl1pPr>
-      <a:lvl2pPr marL="457200" algn="l" defTabSz="914400" rtl="0" eaLnBrk="1" latinLnBrk="0" hangingPunct="1">
-        <a:defRPr sz="1800" kern="1200">
+      <a:lvl2pPr marL="228600" algn="l" defTabSz="457200" rtl="0" eaLnBrk="1" latinLnBrk="0" hangingPunct="1">
+        <a:defRPr sz="900" kern="1200">
           <a:solidFill>
             <a:schemeClr val="tx1"/>
           </a:solidFill>
@@ -3235,8 +2879,8 @@
           <a:cs typeface="+mn-cs"/>
         </a:defRPr>
       </a:lvl2pPr>
-      <a:lvl3pPr marL="914400" algn="l" defTabSz="914400" rtl="0" eaLnBrk="1" latinLnBrk="0" hangingPunct="1">
-        <a:defRPr sz="1800" kern="1200">
+      <a:lvl3pPr marL="457200" algn="l" defTabSz="457200" rtl="0" eaLnBrk="1" latinLnBrk="0" hangingPunct="1">
+        <a:defRPr sz="900" kern="1200">
           <a:solidFill>
             <a:schemeClr val="tx1"/>
           </a:solidFill>
@@ -3245,8 +2889,8 @@
           <a:cs typeface="+mn-cs"/>
         </a:defRPr>
       </a:lvl3pPr>
-      <a:lvl4pPr marL="1371600" algn="l" defTabSz="914400" rtl="0" eaLnBrk="1" latinLnBrk="0" hangingPunct="1">
-        <a:defRPr sz="1800" kern="1200">
+      <a:lvl4pPr marL="685800" algn="l" defTabSz="457200" rtl="0" eaLnBrk="1" latinLnBrk="0" hangingPunct="1">
+        <a:defRPr sz="900" kern="1200">
           <a:solidFill>
             <a:schemeClr val="tx1"/>
           </a:solidFill>
@@ -3255,8 +2899,8 @@
           <a:cs typeface="+mn-cs"/>
         </a:defRPr>
       </a:lvl4pPr>
-      <a:lvl5pPr marL="1828800" algn="l" defTabSz="914400" rtl="0" eaLnBrk="1" latinLnBrk="0" hangingPunct="1">
-        <a:defRPr sz="1800" kern="1200">
+      <a:lvl5pPr marL="914400" algn="l" defTabSz="457200" rtl="0" eaLnBrk="1" latinLnBrk="0" hangingPunct="1">
+        <a:defRPr sz="900" kern="1200">
           <a:solidFill>
             <a:schemeClr val="tx1"/>
           </a:solidFill>
@@ -3265,8 +2909,8 @@
           <a:cs typeface="+mn-cs"/>
         </a:defRPr>
       </a:lvl5pPr>
-      <a:lvl6pPr marL="2286000" algn="l" defTabSz="914400" rtl="0" eaLnBrk="1" latinLnBrk="0" hangingPunct="1">
-        <a:defRPr sz="1800" kern="1200">
+      <a:lvl6pPr marL="1143000" algn="l" defTabSz="457200" rtl="0" eaLnBrk="1" latinLnBrk="0" hangingPunct="1">
+        <a:defRPr sz="900" kern="1200">
           <a:solidFill>
             <a:schemeClr val="tx1"/>
           </a:solidFill>
@@ -3275,8 +2919,8 @@
           <a:cs typeface="+mn-cs"/>
         </a:defRPr>
       </a:lvl6pPr>
-      <a:lvl7pPr marL="2743200" algn="l" defTabSz="914400" rtl="0" eaLnBrk="1" latinLnBrk="0" hangingPunct="1">
-        <a:defRPr sz="1800" kern="1200">
+      <a:lvl7pPr marL="1371600" algn="l" defTabSz="457200" rtl="0" eaLnBrk="1" latinLnBrk="0" hangingPunct="1">
+        <a:defRPr sz="900" kern="1200">
           <a:solidFill>
             <a:schemeClr val="tx1"/>
           </a:solidFill>
@@ -3285,8 +2929,8 @@
           <a:cs typeface="+mn-cs"/>
         </a:defRPr>
       </a:lvl7pPr>
-      <a:lvl8pPr marL="3200400" algn="l" defTabSz="914400" rtl="0" eaLnBrk="1" latinLnBrk="0" hangingPunct="1">
-        <a:defRPr sz="1800" kern="1200">
+      <a:lvl8pPr marL="1600200" algn="l" defTabSz="457200" rtl="0" eaLnBrk="1" latinLnBrk="0" hangingPunct="1">
+        <a:defRPr sz="900" kern="1200">
           <a:solidFill>
             <a:schemeClr val="tx1"/>
           </a:solidFill>
@@ -3295,8 +2939,8 @@
           <a:cs typeface="+mn-cs"/>
         </a:defRPr>
       </a:lvl8pPr>
-      <a:lvl9pPr marL="3657600" algn="l" defTabSz="914400" rtl="0" eaLnBrk="1" latinLnBrk="0" hangingPunct="1">
-        <a:defRPr sz="1800" kern="1200">
+      <a:lvl9pPr marL="1828800" algn="l" defTabSz="457200" rtl="0" eaLnBrk="1" latinLnBrk="0" hangingPunct="1">
+        <a:defRPr sz="900" kern="1200">
           <a:solidFill>
             <a:schemeClr val="tx1"/>
           </a:solidFill>
@@ -3329,472 +2973,297 @@
       </p:grpSpPr>
       <p:grpSp>
         <p:nvGrpSpPr>
-          <p:cNvPr id="18" name="Group 17">
+          <p:cNvPr id="2" name="Group 1">
             <a:extLst>
               <a:ext uri="{FF2B5EF4-FFF2-40B4-BE49-F238E27FC236}">
-                <a16:creationId xmlns:a16="http://schemas.microsoft.com/office/drawing/2014/main" id="{52794EF9-C5F7-DB85-79B8-32B55A660D0D}"/>
+                <a16:creationId xmlns:a16="http://schemas.microsoft.com/office/drawing/2014/main" id="{A1A4F955-D612-FD30-5FA2-F2EEB691FA5D}"/>
               </a:ext>
             </a:extLst>
           </p:cNvPr>
-          <p:cNvGrpSpPr/>
+          <p:cNvGrpSpPr>
+            <a:grpSpLocks noChangeAspect="1"/>
+          </p:cNvGrpSpPr>
           <p:nvPr/>
         </p:nvGrpSpPr>
         <p:grpSpPr>
           <a:xfrm>
-            <a:off x="181960" y="743814"/>
-            <a:ext cx="525517" cy="4756198"/>
-            <a:chOff x="2448910" y="868999"/>
-            <a:chExt cx="525517" cy="4756198"/>
+            <a:off x="33079" y="197956"/>
+            <a:ext cx="4517901" cy="5870153"/>
+            <a:chOff x="-2029931" y="1145734"/>
+            <a:chExt cx="3427251" cy="4453061"/>
           </a:xfrm>
         </p:grpSpPr>
-        <p:sp>
-          <p:nvSpPr>
-            <p:cNvPr id="15" name="TextBox 14">
+        <p:grpSp>
+          <p:nvGrpSpPr>
+            <p:cNvPr id="6" name="Group 5">
               <a:extLst>
                 <a:ext uri="{FF2B5EF4-FFF2-40B4-BE49-F238E27FC236}">
-                  <a16:creationId xmlns:a16="http://schemas.microsoft.com/office/drawing/2014/main" id="{C1BB3A7C-18BF-0E9A-D07F-72782A243A65}"/>
+                  <a16:creationId xmlns:a16="http://schemas.microsoft.com/office/drawing/2014/main" id="{1407540E-D561-5162-473D-636D66E2B74A}"/>
                 </a:ext>
               </a:extLst>
             </p:cNvPr>
-            <p:cNvSpPr txBox="1"/>
+            <p:cNvGrpSpPr/>
             <p:nvPr/>
-          </p:nvSpPr>
+          </p:nvGrpSpPr>
+          <p:grpSpPr>
+            <a:xfrm>
+              <a:off x="-2029931" y="1415111"/>
+              <a:ext cx="394139" cy="1874761"/>
+              <a:chOff x="2608372" y="868999"/>
+              <a:chExt cx="525518" cy="2499681"/>
+            </a:xfrm>
+          </p:grpSpPr>
+          <p:sp>
+            <p:nvSpPr>
+              <p:cNvPr id="7" name="TextBox 6">
+                <a:extLst>
+                  <a:ext uri="{FF2B5EF4-FFF2-40B4-BE49-F238E27FC236}">
+                    <a16:creationId xmlns:a16="http://schemas.microsoft.com/office/drawing/2014/main" id="{B2A46178-8622-F6B2-2510-B5F39FE7A262}"/>
+                  </a:ext>
+                </a:extLst>
+              </p:cNvPr>
+              <p:cNvSpPr txBox="1"/>
+              <p:nvPr/>
+            </p:nvSpPr>
+            <p:spPr>
+              <a:xfrm>
+                <a:off x="2608373" y="868999"/>
+                <a:ext cx="525517" cy="303520"/>
+              </a:xfrm>
+              <a:prstGeom prst="rect">
+                <a:avLst/>
+              </a:prstGeom>
+              <a:noFill/>
+            </p:spPr>
+            <p:txBody>
+              <a:bodyPr wrap="square" rtlCol="0">
+                <a:spAutoFit/>
+              </a:bodyPr>
+              <a:lstStyle/>
+              <a:p>
+                <a:pPr algn="ctr"/>
+                <a:r>
+                  <a:rPr lang="en-US" sz="1350" dirty="0">
+                    <a:latin typeface="Times New Roman" panose="02020603050405020304" pitchFamily="18" charset="0"/>
+                    <a:cs typeface="Times New Roman" panose="02020603050405020304" pitchFamily="18" charset="0"/>
+                  </a:rPr>
+                  <a:t>(</a:t>
+                </a:r>
+                <a:r>
+                  <a:rPr lang="en-US" sz="1350" i="1" dirty="0">
+                    <a:latin typeface="Times New Roman" panose="02020603050405020304" pitchFamily="18" charset="0"/>
+                    <a:cs typeface="Times New Roman" panose="02020603050405020304" pitchFamily="18" charset="0"/>
+                  </a:rPr>
+                  <a:t>a</a:t>
+                </a:r>
+                <a:r>
+                  <a:rPr lang="en-US" sz="1350" dirty="0">
+                    <a:latin typeface="Times New Roman" panose="02020603050405020304" pitchFamily="18" charset="0"/>
+                    <a:cs typeface="Times New Roman" panose="02020603050405020304" pitchFamily="18" charset="0"/>
+                  </a:rPr>
+                  <a:t>)</a:t>
+                </a:r>
+              </a:p>
+            </p:txBody>
+          </p:sp>
+          <p:sp>
+            <p:nvSpPr>
+              <p:cNvPr id="8" name="TextBox 7">
+                <a:extLst>
+                  <a:ext uri="{FF2B5EF4-FFF2-40B4-BE49-F238E27FC236}">
+                    <a16:creationId xmlns:a16="http://schemas.microsoft.com/office/drawing/2014/main" id="{C02289DD-A89F-ED4C-6EB4-E35EBBC23414}"/>
+                  </a:ext>
+                </a:extLst>
+              </p:cNvPr>
+              <p:cNvSpPr txBox="1"/>
+              <p:nvPr/>
+            </p:nvSpPr>
+            <p:spPr>
+              <a:xfrm>
+                <a:off x="2608372" y="3065160"/>
+                <a:ext cx="525517" cy="303520"/>
+              </a:xfrm>
+              <a:prstGeom prst="rect">
+                <a:avLst/>
+              </a:prstGeom>
+              <a:noFill/>
+            </p:spPr>
+            <p:txBody>
+              <a:bodyPr wrap="square" rtlCol="0">
+                <a:spAutoFit/>
+              </a:bodyPr>
+              <a:lstStyle/>
+              <a:p>
+                <a:pPr algn="ctr"/>
+                <a:r>
+                  <a:rPr lang="en-US" sz="1350" dirty="0">
+                    <a:latin typeface="Times New Roman" panose="02020603050405020304" pitchFamily="18" charset="0"/>
+                    <a:cs typeface="Times New Roman" panose="02020603050405020304" pitchFamily="18" charset="0"/>
+                  </a:rPr>
+                  <a:t>(</a:t>
+                </a:r>
+                <a:r>
+                  <a:rPr lang="en-US" sz="1350" i="1" dirty="0">
+                    <a:latin typeface="Times New Roman" panose="02020603050405020304" pitchFamily="18" charset="0"/>
+                    <a:cs typeface="Times New Roman" panose="02020603050405020304" pitchFamily="18" charset="0"/>
+                  </a:rPr>
+                  <a:t>b</a:t>
+                </a:r>
+                <a:r>
+                  <a:rPr lang="en-US" sz="1350" dirty="0">
+                    <a:latin typeface="Times New Roman" panose="02020603050405020304" pitchFamily="18" charset="0"/>
+                    <a:cs typeface="Times New Roman" panose="02020603050405020304" pitchFamily="18" charset="0"/>
+                  </a:rPr>
+                  <a:t>)</a:t>
+                </a:r>
+              </a:p>
+            </p:txBody>
+          </p:sp>
+        </p:grpSp>
+        <p:pic>
+          <p:nvPicPr>
+            <p:cNvPr id="10" name="Picture 9">
+              <a:extLst>
+                <a:ext uri="{FF2B5EF4-FFF2-40B4-BE49-F238E27FC236}">
+                  <a16:creationId xmlns:a16="http://schemas.microsoft.com/office/drawing/2014/main" id="{33A7AB1F-EA84-CD8C-0598-F3E3C20494C5}"/>
+                </a:ext>
+              </a:extLst>
+            </p:cNvPr>
+            <p:cNvPicPr>
+              <a:picLocks noChangeAspect="1"/>
+            </p:cNvPicPr>
+            <p:nvPr/>
+          </p:nvPicPr>
+          <p:blipFill>
+            <a:blip r:embed="rId2"/>
+            <a:stretch>
+              <a:fillRect/>
+            </a:stretch>
+          </p:blipFill>
           <p:spPr>
             <a:xfrm>
-              <a:off x="2448910" y="868999"/>
-              <a:ext cx="525517" cy="369332"/>
+              <a:off x="-1788793" y="4182745"/>
+              <a:ext cx="3186113" cy="1416050"/>
             </a:xfrm>
             <a:prstGeom prst="rect">
               <a:avLst/>
             </a:prstGeom>
-            <a:noFill/>
           </p:spPr>
-          <p:txBody>
-            <a:bodyPr wrap="square" rtlCol="0">
-              <a:spAutoFit/>
-            </a:bodyPr>
-            <a:lstStyle/>
-            <a:p>
-              <a:pPr algn="ctr"/>
-              <a:r>
-                <a:rPr lang="en-US" dirty="0"/>
-                <a:t>(a)</a:t>
-              </a:r>
-            </a:p>
-          </p:txBody>
-        </p:sp>
-        <p:sp>
-          <p:nvSpPr>
-            <p:cNvPr id="16" name="TextBox 15">
+        </p:pic>
+        <p:pic>
+          <p:nvPicPr>
+            <p:cNvPr id="11" name="Picture 10">
               <a:extLst>
                 <a:ext uri="{FF2B5EF4-FFF2-40B4-BE49-F238E27FC236}">
-                  <a16:creationId xmlns:a16="http://schemas.microsoft.com/office/drawing/2014/main" id="{DFC038CD-A11C-B1CB-E555-7564E8268216}"/>
+                  <a16:creationId xmlns:a16="http://schemas.microsoft.com/office/drawing/2014/main" id="{8336697D-183A-3E5E-EF48-F9D43CEA5D3A}"/>
                 </a:ext>
               </a:extLst>
             </p:cNvPr>
-            <p:cNvSpPr txBox="1"/>
+            <p:cNvPicPr>
+              <a:picLocks noChangeAspect="1"/>
+            </p:cNvPicPr>
             <p:nvPr/>
-          </p:nvSpPr>
+          </p:nvPicPr>
+          <p:blipFill>
+            <a:blip r:embed="rId3"/>
+            <a:stretch>
+              <a:fillRect/>
+            </a:stretch>
+          </p:blipFill>
           <p:spPr>
             <a:xfrm>
-              <a:off x="2448910" y="3113688"/>
-              <a:ext cx="525517" cy="369332"/>
+              <a:off x="-1747519" y="2652925"/>
+              <a:ext cx="3127253" cy="1389890"/>
             </a:xfrm>
             <a:prstGeom prst="rect">
               <a:avLst/>
             </a:prstGeom>
-            <a:noFill/>
           </p:spPr>
-          <p:txBody>
-            <a:bodyPr wrap="square" rtlCol="0">
-              <a:spAutoFit/>
-            </a:bodyPr>
-            <a:lstStyle/>
-            <a:p>
-              <a:pPr algn="ctr"/>
-              <a:r>
-                <a:rPr lang="en-US" dirty="0"/>
-                <a:t>(b)</a:t>
-              </a:r>
-            </a:p>
-          </p:txBody>
-        </p:sp>
-        <p:sp>
-          <p:nvSpPr>
-            <p:cNvPr id="17" name="TextBox 16">
+        </p:pic>
+        <p:pic>
+          <p:nvPicPr>
+            <p:cNvPr id="13" name="Picture 12">
               <a:extLst>
                 <a:ext uri="{FF2B5EF4-FFF2-40B4-BE49-F238E27FC236}">
-                  <a16:creationId xmlns:a16="http://schemas.microsoft.com/office/drawing/2014/main" id="{42C86A87-D47B-56AE-3D0E-0D572B14B9DB}"/>
+                  <a16:creationId xmlns:a16="http://schemas.microsoft.com/office/drawing/2014/main" id="{8F42B7DD-8B9A-1673-F220-16BEAF82499B}"/>
                 </a:ext>
               </a:extLst>
             </p:cNvPr>
-            <p:cNvSpPr txBox="1"/>
+            <p:cNvPicPr>
+              <a:picLocks noChangeAspect="1"/>
+            </p:cNvPicPr>
             <p:nvPr/>
-          </p:nvSpPr>
+          </p:nvPicPr>
+          <p:blipFill>
+            <a:blip r:embed="rId4"/>
+            <a:stretch>
+              <a:fillRect/>
+            </a:stretch>
+          </p:blipFill>
           <p:spPr>
             <a:xfrm>
-              <a:off x="2448910" y="5255865"/>
-              <a:ext cx="525517" cy="369332"/>
+              <a:off x="-1748790" y="1145734"/>
+              <a:ext cx="3127252" cy="1389890"/>
             </a:xfrm>
             <a:prstGeom prst="rect">
               <a:avLst/>
             </a:prstGeom>
-            <a:noFill/>
           </p:spPr>
-          <p:txBody>
-            <a:bodyPr wrap="square" rtlCol="0">
-              <a:spAutoFit/>
-            </a:bodyPr>
-            <a:lstStyle/>
-            <a:p>
-              <a:pPr algn="ctr"/>
-              <a:r>
-                <a:rPr lang="en-US" dirty="0"/>
-                <a:t>(c)</a:t>
-              </a:r>
-            </a:p>
-          </p:txBody>
-        </p:sp>
+        </p:pic>
       </p:grpSp>
-      <p:pic>
-        <p:nvPicPr>
-          <p:cNvPr id="6" name="Picture 5">
+      <p:sp>
+        <p:nvSpPr>
+          <p:cNvPr id="3" name="TextBox 2">
             <a:extLst>
               <a:ext uri="{FF2B5EF4-FFF2-40B4-BE49-F238E27FC236}">
-                <a16:creationId xmlns:a16="http://schemas.microsoft.com/office/drawing/2014/main" id="{D61F37D1-05C7-A8F6-129E-A9542AD77789}"/>
+                <a16:creationId xmlns:a16="http://schemas.microsoft.com/office/drawing/2014/main" id="{342548C7-1986-7B72-62CF-F7FB3D716DB0}"/>
               </a:ext>
             </a:extLst>
           </p:cNvPr>
-          <p:cNvPicPr>
-            <a:picLocks noChangeAspect="1"/>
-          </p:cNvPicPr>
+          <p:cNvSpPr txBox="1"/>
           <p:nvPr/>
-        </p:nvPicPr>
-        <p:blipFill>
-          <a:blip r:embed="rId2"/>
-          <a:stretch>
-            <a:fillRect/>
-          </a:stretch>
-        </p:blipFill>
+        </p:nvSpPr>
         <p:spPr>
           <a:xfrm>
-            <a:off x="535093" y="4244707"/>
-            <a:ext cx="4584277" cy="2292139"/>
+            <a:off x="37373" y="4834688"/>
+            <a:ext cx="519565" cy="300082"/>
           </a:xfrm>
           <a:prstGeom prst="rect">
             <a:avLst/>
           </a:prstGeom>
+          <a:noFill/>
         </p:spPr>
-      </p:pic>
-      <p:pic>
-        <p:nvPicPr>
-          <p:cNvPr id="2" name="Picture 1">
-            <a:extLst>
-              <a:ext uri="{FF2B5EF4-FFF2-40B4-BE49-F238E27FC236}">
-                <a16:creationId xmlns:a16="http://schemas.microsoft.com/office/drawing/2014/main" id="{2EBF3DD6-5020-D9F5-1CD5-DB1D3083A045}"/>
-              </a:ext>
-            </a:extLst>
-          </p:cNvPr>
-          <p:cNvPicPr>
-            <a:picLocks noChangeAspect="1"/>
-          </p:cNvPicPr>
-          <p:nvPr/>
-        </p:nvPicPr>
-        <p:blipFill>
-          <a:blip r:embed="rId3"/>
-          <a:stretch>
-            <a:fillRect/>
-          </a:stretch>
-        </p:blipFill>
-        <p:spPr>
-          <a:xfrm>
-            <a:off x="684641" y="2427973"/>
-            <a:ext cx="4084182" cy="1815192"/>
-          </a:xfrm>
-          <a:prstGeom prst="rect">
-            <a:avLst/>
-          </a:prstGeom>
-        </p:spPr>
-      </p:pic>
-      <p:pic>
-        <p:nvPicPr>
-          <p:cNvPr id="4" name="Picture 3">
-            <a:extLst>
-              <a:ext uri="{FF2B5EF4-FFF2-40B4-BE49-F238E27FC236}">
-                <a16:creationId xmlns:a16="http://schemas.microsoft.com/office/drawing/2014/main" id="{1837E5BC-8658-B1F2-A475-9C1829739A35}"/>
-              </a:ext>
-            </a:extLst>
-          </p:cNvPr>
-          <p:cNvPicPr>
-            <a:picLocks noChangeAspect="1"/>
-          </p:cNvPicPr>
-          <p:nvPr/>
-        </p:nvPicPr>
-        <p:blipFill>
-          <a:blip r:embed="rId4"/>
-          <a:stretch>
-            <a:fillRect/>
-          </a:stretch>
-        </p:blipFill>
-        <p:spPr>
-          <a:xfrm>
-            <a:off x="684641" y="342381"/>
-            <a:ext cx="4084182" cy="1815192"/>
-          </a:xfrm>
-          <a:prstGeom prst="rect">
-            <a:avLst/>
-          </a:prstGeom>
-        </p:spPr>
-      </p:pic>
-    </p:spTree>
-    <p:extLst>
-      <p:ext uri="{BB962C8B-B14F-4D97-AF65-F5344CB8AC3E}">
-        <p14:creationId xmlns:p14="http://schemas.microsoft.com/office/powerpoint/2010/main" val="419429987"/>
-      </p:ext>
-    </p:extLst>
-  </p:cSld>
-  <p:clrMapOvr>
-    <a:masterClrMapping/>
-  </p:clrMapOvr>
-</p:sld>
-</file>
-
-<file path=ppt/slides/slide2.xml><?xml version="1.0" encoding="utf-8"?>
-<p:sld xmlns:a="http://schemas.openxmlformats.org/drawingml/2006/main" xmlns:r="http://schemas.openxmlformats.org/officeDocument/2006/relationships" xmlns:p="http://schemas.openxmlformats.org/presentationml/2006/main">
-  <p:cSld>
-    <p:spTree>
-      <p:nvGrpSpPr>
-        <p:cNvPr id="1" name=""/>
-        <p:cNvGrpSpPr/>
-        <p:nvPr/>
-      </p:nvGrpSpPr>
-      <p:grpSpPr>
-        <a:xfrm>
-          <a:off x="0" y="0"/>
-          <a:ext cx="0" cy="0"/>
-          <a:chOff x="0" y="0"/>
-          <a:chExt cx="0" cy="0"/>
-        </a:xfrm>
-      </p:grpSpPr>
-      <p:grpSp>
-        <p:nvGrpSpPr>
-          <p:cNvPr id="6" name="Group 5">
-            <a:extLst>
-              <a:ext uri="{FF2B5EF4-FFF2-40B4-BE49-F238E27FC236}">
-                <a16:creationId xmlns:a16="http://schemas.microsoft.com/office/drawing/2014/main" id="{1407540E-D561-5162-473D-636D66E2B74A}"/>
-              </a:ext>
-            </a:extLst>
-          </p:cNvPr>
-          <p:cNvGrpSpPr/>
-          <p:nvPr/>
-        </p:nvGrpSpPr>
-        <p:grpSpPr>
-          <a:xfrm>
-            <a:off x="181960" y="743814"/>
-            <a:ext cx="525517" cy="4756198"/>
-            <a:chOff x="2448910" y="868999"/>
-            <a:chExt cx="525517" cy="4756198"/>
-          </a:xfrm>
-        </p:grpSpPr>
-        <p:sp>
-          <p:nvSpPr>
-            <p:cNvPr id="7" name="TextBox 6">
-              <a:extLst>
-                <a:ext uri="{FF2B5EF4-FFF2-40B4-BE49-F238E27FC236}">
-                  <a16:creationId xmlns:a16="http://schemas.microsoft.com/office/drawing/2014/main" id="{B2A46178-8622-F6B2-2510-B5F39FE7A262}"/>
-                </a:ext>
-              </a:extLst>
-            </p:cNvPr>
-            <p:cNvSpPr txBox="1"/>
-            <p:nvPr/>
-          </p:nvSpPr>
-          <p:spPr>
-            <a:xfrm>
-              <a:off x="2448910" y="868999"/>
-              <a:ext cx="525517" cy="369332"/>
-            </a:xfrm>
-            <a:prstGeom prst="rect">
-              <a:avLst/>
-            </a:prstGeom>
-            <a:noFill/>
-          </p:spPr>
-          <p:txBody>
-            <a:bodyPr wrap="square" rtlCol="0">
-              <a:spAutoFit/>
-            </a:bodyPr>
-            <a:lstStyle/>
-            <a:p>
-              <a:pPr algn="ctr"/>
-              <a:r>
-                <a:rPr lang="en-US" dirty="0"/>
-                <a:t>(a)</a:t>
-              </a:r>
-            </a:p>
-          </p:txBody>
-        </p:sp>
-        <p:sp>
-          <p:nvSpPr>
-            <p:cNvPr id="8" name="TextBox 7">
-              <a:extLst>
-                <a:ext uri="{FF2B5EF4-FFF2-40B4-BE49-F238E27FC236}">
-                  <a16:creationId xmlns:a16="http://schemas.microsoft.com/office/drawing/2014/main" id="{C02289DD-A89F-ED4C-6EB4-E35EBBC23414}"/>
-                </a:ext>
-              </a:extLst>
-            </p:cNvPr>
-            <p:cNvSpPr txBox="1"/>
-            <p:nvPr/>
-          </p:nvSpPr>
-          <p:spPr>
-            <a:xfrm>
-              <a:off x="2448910" y="3113688"/>
-              <a:ext cx="525517" cy="369332"/>
-            </a:xfrm>
-            <a:prstGeom prst="rect">
-              <a:avLst/>
-            </a:prstGeom>
-            <a:noFill/>
-          </p:spPr>
-          <p:txBody>
-            <a:bodyPr wrap="square" rtlCol="0">
-              <a:spAutoFit/>
-            </a:bodyPr>
-            <a:lstStyle/>
-            <a:p>
-              <a:pPr algn="ctr"/>
-              <a:r>
-                <a:rPr lang="en-US" dirty="0"/>
-                <a:t>(b)</a:t>
-              </a:r>
-            </a:p>
-          </p:txBody>
-        </p:sp>
-        <p:sp>
-          <p:nvSpPr>
-            <p:cNvPr id="9" name="TextBox 8">
-              <a:extLst>
-                <a:ext uri="{FF2B5EF4-FFF2-40B4-BE49-F238E27FC236}">
-                  <a16:creationId xmlns:a16="http://schemas.microsoft.com/office/drawing/2014/main" id="{1ECA9599-887F-9A67-CBF5-958CA54B2402}"/>
-                </a:ext>
-              </a:extLst>
-            </p:cNvPr>
-            <p:cNvSpPr txBox="1"/>
-            <p:nvPr/>
-          </p:nvSpPr>
-          <p:spPr>
-            <a:xfrm>
-              <a:off x="2448910" y="5255865"/>
-              <a:ext cx="525517" cy="369332"/>
-            </a:xfrm>
-            <a:prstGeom prst="rect">
-              <a:avLst/>
-            </a:prstGeom>
-            <a:noFill/>
-          </p:spPr>
-          <p:txBody>
-            <a:bodyPr wrap="square" rtlCol="0">
-              <a:spAutoFit/>
-            </a:bodyPr>
-            <a:lstStyle/>
-            <a:p>
-              <a:pPr algn="ctr"/>
-              <a:r>
-                <a:rPr lang="en-US" dirty="0"/>
-                <a:t>(c)</a:t>
-              </a:r>
-            </a:p>
-          </p:txBody>
-        </p:sp>
-      </p:grpSp>
-      <p:pic>
-        <p:nvPicPr>
-          <p:cNvPr id="10" name="Picture 9">
-            <a:extLst>
-              <a:ext uri="{FF2B5EF4-FFF2-40B4-BE49-F238E27FC236}">
-                <a16:creationId xmlns:a16="http://schemas.microsoft.com/office/drawing/2014/main" id="{33A7AB1F-EA84-CD8C-0598-F3E3C20494C5}"/>
-              </a:ext>
-            </a:extLst>
-          </p:cNvPr>
-          <p:cNvPicPr>
-            <a:picLocks noChangeAspect="1"/>
-          </p:cNvPicPr>
-          <p:nvPr/>
-        </p:nvPicPr>
-        <p:blipFill>
-          <a:blip r:embed="rId2"/>
-          <a:stretch>
-            <a:fillRect/>
-          </a:stretch>
-        </p:blipFill>
-        <p:spPr>
-          <a:xfrm>
-            <a:off x="662942" y="4433992"/>
-            <a:ext cx="4248151" cy="1888067"/>
-          </a:xfrm>
-          <a:prstGeom prst="rect">
-            <a:avLst/>
-          </a:prstGeom>
-        </p:spPr>
-      </p:pic>
-      <p:pic>
-        <p:nvPicPr>
-          <p:cNvPr id="11" name="Picture 10">
-            <a:extLst>
-              <a:ext uri="{FF2B5EF4-FFF2-40B4-BE49-F238E27FC236}">
-                <a16:creationId xmlns:a16="http://schemas.microsoft.com/office/drawing/2014/main" id="{8336697D-183A-3E5E-EF48-F9D43CEA5D3A}"/>
-              </a:ext>
-            </a:extLst>
-          </p:cNvPr>
-          <p:cNvPicPr>
-            <a:picLocks noChangeAspect="1"/>
-          </p:cNvPicPr>
-          <p:nvPr/>
-        </p:nvPicPr>
-        <p:blipFill>
-          <a:blip r:embed="rId3"/>
-          <a:stretch>
-            <a:fillRect/>
-          </a:stretch>
-        </p:blipFill>
-        <p:spPr>
-          <a:xfrm>
-            <a:off x="717974" y="2394232"/>
-            <a:ext cx="4169671" cy="1853187"/>
-          </a:xfrm>
-          <a:prstGeom prst="rect">
-            <a:avLst/>
-          </a:prstGeom>
-        </p:spPr>
-      </p:pic>
-      <p:pic>
-        <p:nvPicPr>
-          <p:cNvPr id="13" name="Picture 12">
-            <a:extLst>
-              <a:ext uri="{FF2B5EF4-FFF2-40B4-BE49-F238E27FC236}">
-                <a16:creationId xmlns:a16="http://schemas.microsoft.com/office/drawing/2014/main" id="{8F42B7DD-8B9A-1673-F220-16BEAF82499B}"/>
-              </a:ext>
-            </a:extLst>
-          </p:cNvPr>
-          <p:cNvPicPr>
-            <a:picLocks noChangeAspect="1"/>
-          </p:cNvPicPr>
-          <p:nvPr/>
-        </p:nvPicPr>
-        <p:blipFill>
-          <a:blip r:embed="rId4"/>
-          <a:stretch>
-            <a:fillRect/>
-          </a:stretch>
-        </p:blipFill>
-        <p:spPr>
-          <a:xfrm>
-            <a:off x="716280" y="384646"/>
-            <a:ext cx="4169669" cy="1853186"/>
-          </a:xfrm>
-          <a:prstGeom prst="rect">
-            <a:avLst/>
-          </a:prstGeom>
-        </p:spPr>
-      </p:pic>
+        <p:txBody>
+          <a:bodyPr wrap="square" rtlCol="0">
+            <a:spAutoFit/>
+          </a:bodyPr>
+          <a:lstStyle/>
+          <a:p>
+            <a:pPr algn="ctr"/>
+            <a:r>
+              <a:rPr lang="en-US" sz="1350" dirty="0">
+                <a:latin typeface="Times New Roman" panose="02020603050405020304" pitchFamily="18" charset="0"/>
+                <a:cs typeface="Times New Roman" panose="02020603050405020304" pitchFamily="18" charset="0"/>
+              </a:rPr>
+              <a:t>(</a:t>
+            </a:r>
+            <a:r>
+              <a:rPr lang="en-US" sz="1350" i="1" dirty="0">
+                <a:latin typeface="Times New Roman" panose="02020603050405020304" pitchFamily="18" charset="0"/>
+                <a:cs typeface="Times New Roman" panose="02020603050405020304" pitchFamily="18" charset="0"/>
+              </a:rPr>
+              <a:t>c</a:t>
+            </a:r>
+            <a:r>
+              <a:rPr lang="en-US" sz="1350" dirty="0">
+                <a:latin typeface="Times New Roman" panose="02020603050405020304" pitchFamily="18" charset="0"/>
+                <a:cs typeface="Times New Roman" panose="02020603050405020304" pitchFamily="18" charset="0"/>
+              </a:rPr>
+              <a:t>)</a:t>
+            </a:r>
+          </a:p>
+        </p:txBody>
+      </p:sp>
     </p:spTree>
     <p:extLst>
       <p:ext uri="{BB962C8B-B14F-4D97-AF65-F5344CB8AC3E}">
@@ -3811,7 +3280,7 @@
 <file path=ppt/theme/theme1.xml><?xml version="1.0" encoding="utf-8"?>
 <a:theme xmlns:a="http://schemas.openxmlformats.org/drawingml/2006/main" name="Office Theme">
   <a:themeElements>
-    <a:clrScheme name="Office">
+    <a:clrScheme name="Office Theme">
       <a:dk1>
         <a:sysClr val="windowText" lastClr="000000"/>
       </a:dk1>
@@ -3849,7 +3318,7 @@
         <a:srgbClr val="954F72"/>
       </a:folHlink>
     </a:clrScheme>
-    <a:fontScheme name="Office">
+    <a:fontScheme name="Office Theme">
       <a:majorFont>
         <a:latin typeface="Calibri Light" panose="020F0302020204030204"/>
         <a:ea typeface=""/>
@@ -3884,23 +3353,6 @@
         <a:font script="Viet" typeface="Times New Roman"/>
         <a:font script="Uigh" typeface="Microsoft Uighur"/>
         <a:font script="Geor" typeface="Sylfaen"/>
-        <a:font script="Armn" typeface="Arial"/>
-        <a:font script="Bugi" typeface="Leelawadee UI"/>
-        <a:font script="Bopo" typeface="Microsoft JhengHei"/>
-        <a:font script="Java" typeface="Javanese Text"/>
-        <a:font script="Lisu" typeface="Segoe UI"/>
-        <a:font script="Mymr" typeface="Myanmar Text"/>
-        <a:font script="Nkoo" typeface="Ebrima"/>
-        <a:font script="Olck" typeface="Nirmala UI"/>
-        <a:font script="Osma" typeface="Ebrima"/>
-        <a:font script="Phag" typeface="Phagspa"/>
-        <a:font script="Syrn" typeface="Estrangelo Edessa"/>
-        <a:font script="Syrj" typeface="Estrangelo Edessa"/>
-        <a:font script="Syre" typeface="Estrangelo Edessa"/>
-        <a:font script="Sora" typeface="Nirmala UI"/>
-        <a:font script="Tale" typeface="Microsoft Tai Le"/>
-        <a:font script="Talu" typeface="Microsoft New Tai Lue"/>
-        <a:font script="Tfng" typeface="Ebrima"/>
       </a:majorFont>
       <a:minorFont>
         <a:latin typeface="Calibri" panose="020F0502020204030204"/>
@@ -3936,26 +3388,9 @@
         <a:font script="Viet" typeface="Arial"/>
         <a:font script="Uigh" typeface="Microsoft Uighur"/>
         <a:font script="Geor" typeface="Sylfaen"/>
-        <a:font script="Armn" typeface="Arial"/>
-        <a:font script="Bugi" typeface="Leelawadee UI"/>
-        <a:font script="Bopo" typeface="Microsoft JhengHei"/>
-        <a:font script="Java" typeface="Javanese Text"/>
-        <a:font script="Lisu" typeface="Segoe UI"/>
-        <a:font script="Mymr" typeface="Myanmar Text"/>
-        <a:font script="Nkoo" typeface="Ebrima"/>
-        <a:font script="Olck" typeface="Nirmala UI"/>
-        <a:font script="Osma" typeface="Ebrima"/>
-        <a:font script="Phag" typeface="Phagspa"/>
-        <a:font script="Syrn" typeface="Estrangelo Edessa"/>
-        <a:font script="Syrj" typeface="Estrangelo Edessa"/>
-        <a:font script="Syre" typeface="Estrangelo Edessa"/>
-        <a:font script="Sora" typeface="Nirmala UI"/>
-        <a:font script="Tale" typeface="Microsoft Tai Le"/>
-        <a:font script="Talu" typeface="Microsoft New Tai Lue"/>
-        <a:font script="Tfng" typeface="Ebrima"/>
       </a:minorFont>
     </a:fontScheme>
-    <a:fmtScheme name="Office">
+    <a:fmtScheme name="Office Theme">
       <a:fillStyleLst>
         <a:solidFill>
           <a:schemeClr val="phClr"/>
@@ -4097,7 +3532,7 @@
   <a:extraClrSchemeLst/>
   <a:extLst>
     <a:ext uri="{05A4C25C-085E-4340-85A3-A5531E510DB2}">
-      <thm15:themeFamily xmlns:thm15="http://schemas.microsoft.com/office/thememl/2012/main" name="Office Theme" id="{62F939B6-93AF-4DB8-9C6B-D6C7DFDC589F}" vid="{4A3C46E8-61CC-4603-A589-7422A47A8E4A}"/>
+      <thm15:themeFamily xmlns:thm15="http://schemas.microsoft.com/office/thememl/2012/main" name="Office 2013 - 2022 Theme" id="{62F939B6-93AF-4DB8-9C6B-D6C7DFDC589F}" vid="{4A3C46E8-61CC-4603-A589-7422A47A8E4A}"/>
     </a:ext>
   </a:extLst>
 </a:theme>

--- a/Sample code/Figure 6. Growth and ablation/Figure - growth_and_ablation.pptx
+++ b/Sample code/Figure 6. Growth and ablation/Figure - growth_and_ablation.pptx
@@ -243,7 +243,7 @@
           <a:p>
             <a:fld id="{7918679B-5683-0049-8DD0-2AC74A9489F6}" type="datetimeFigureOut">
               <a:rPr lang="en-US" smtClean="0"/>
-              <a:t>9/17/26</a:t>
+              <a:t>10/25/26</a:t>
             </a:fld>
             <a:endParaRPr lang="en-US"/>
           </a:p>
@@ -413,7 +413,7 @@
           <a:p>
             <a:fld id="{7918679B-5683-0049-8DD0-2AC74A9489F6}" type="datetimeFigureOut">
               <a:rPr lang="en-US" smtClean="0"/>
-              <a:t>9/17/26</a:t>
+              <a:t>10/25/26</a:t>
             </a:fld>
             <a:endParaRPr lang="en-US"/>
           </a:p>
@@ -593,7 +593,7 @@
           <a:p>
             <a:fld id="{7918679B-5683-0049-8DD0-2AC74A9489F6}" type="datetimeFigureOut">
               <a:rPr lang="en-US" smtClean="0"/>
-              <a:t>9/17/26</a:t>
+              <a:t>10/25/26</a:t>
             </a:fld>
             <a:endParaRPr lang="en-US"/>
           </a:p>
@@ -763,7 +763,7 @@
           <a:p>
             <a:fld id="{7918679B-5683-0049-8DD0-2AC74A9489F6}" type="datetimeFigureOut">
               <a:rPr lang="en-US" smtClean="0"/>
-              <a:t>9/17/26</a:t>
+              <a:t>10/25/26</a:t>
             </a:fld>
             <a:endParaRPr lang="en-US"/>
           </a:p>
@@ -1007,7 +1007,7 @@
           <a:p>
             <a:fld id="{7918679B-5683-0049-8DD0-2AC74A9489F6}" type="datetimeFigureOut">
               <a:rPr lang="en-US" smtClean="0"/>
-              <a:t>9/17/26</a:t>
+              <a:t>10/25/26</a:t>
             </a:fld>
             <a:endParaRPr lang="en-US"/>
           </a:p>
@@ -1239,7 +1239,7 @@
           <a:p>
             <a:fld id="{7918679B-5683-0049-8DD0-2AC74A9489F6}" type="datetimeFigureOut">
               <a:rPr lang="en-US" smtClean="0"/>
-              <a:t>9/17/26</a:t>
+              <a:t>10/25/26</a:t>
             </a:fld>
             <a:endParaRPr lang="en-US"/>
           </a:p>
@@ -1606,7 +1606,7 @@
           <a:p>
             <a:fld id="{7918679B-5683-0049-8DD0-2AC74A9489F6}" type="datetimeFigureOut">
               <a:rPr lang="en-US" smtClean="0"/>
-              <a:t>9/17/26</a:t>
+              <a:t>10/25/26</a:t>
             </a:fld>
             <a:endParaRPr lang="en-US"/>
           </a:p>
@@ -1724,7 +1724,7 @@
           <a:p>
             <a:fld id="{7918679B-5683-0049-8DD0-2AC74A9489F6}" type="datetimeFigureOut">
               <a:rPr lang="en-US" smtClean="0"/>
-              <a:t>9/17/26</a:t>
+              <a:t>10/25/26</a:t>
             </a:fld>
             <a:endParaRPr lang="en-US"/>
           </a:p>
@@ -1819,7 +1819,7 @@
           <a:p>
             <a:fld id="{7918679B-5683-0049-8DD0-2AC74A9489F6}" type="datetimeFigureOut">
               <a:rPr lang="en-US" smtClean="0"/>
-              <a:t>9/17/26</a:t>
+              <a:t>10/25/26</a:t>
             </a:fld>
             <a:endParaRPr lang="en-US"/>
           </a:p>
@@ -2096,7 +2096,7 @@
           <a:p>
             <a:fld id="{7918679B-5683-0049-8DD0-2AC74A9489F6}" type="datetimeFigureOut">
               <a:rPr lang="en-US" smtClean="0"/>
-              <a:t>9/17/26</a:t>
+              <a:t>10/25/26</a:t>
             </a:fld>
             <a:endParaRPr lang="en-US"/>
           </a:p>
@@ -2353,7 +2353,7 @@
           <a:p>
             <a:fld id="{7918679B-5683-0049-8DD0-2AC74A9489F6}" type="datetimeFigureOut">
               <a:rPr lang="en-US" smtClean="0"/>
-              <a:t>9/17/26</a:t>
+              <a:t>10/25/26</a:t>
             </a:fld>
             <a:endParaRPr lang="en-US"/>
           </a:p>
@@ -2566,7 +2566,7 @@
           <a:p>
             <a:fld id="{7918679B-5683-0049-8DD0-2AC74A9489F6}" type="datetimeFigureOut">
               <a:rPr lang="en-US" smtClean="0"/>
-              <a:t>9/17/26</a:t>
+              <a:t>10/25/26</a:t>
             </a:fld>
             <a:endParaRPr lang="en-US"/>
           </a:p>
@@ -3007,10 +3007,10 @@
           </p:nvGrpSpPr>
           <p:grpSpPr>
             <a:xfrm>
-              <a:off x="-2029931" y="1415111"/>
-              <a:ext cx="394139" cy="1874761"/>
-              <a:chOff x="2608372" y="868999"/>
-              <a:chExt cx="525518" cy="2499681"/>
+              <a:off x="-2029931" y="1630381"/>
+              <a:ext cx="394139" cy="1723274"/>
+              <a:chOff x="2608372" y="1156027"/>
+              <a:chExt cx="525518" cy="2297695"/>
             </a:xfrm>
           </p:grpSpPr>
           <p:sp>
@@ -3027,8 +3027,8 @@
             </p:nvSpPr>
             <p:spPr>
               <a:xfrm>
-                <a:off x="2608373" y="868999"/>
-                <a:ext cx="525517" cy="303520"/>
+                <a:off x="2608373" y="1156027"/>
+                <a:ext cx="525517" cy="303521"/>
               </a:xfrm>
               <a:prstGeom prst="rect">
                 <a:avLst/>
@@ -3080,7 +3080,7 @@
             </p:nvSpPr>
             <p:spPr>
               <a:xfrm>
-                <a:off x="2608372" y="3065160"/>
+                <a:off x="2608372" y="3150202"/>
                 <a:ext cx="525517" cy="303520"/>
               </a:xfrm>
               <a:prstGeom prst="rect">
@@ -3225,7 +3225,7 @@
         </p:nvSpPr>
         <p:spPr>
           <a:xfrm>
-            <a:off x="37373" y="4834688"/>
+            <a:off x="37373" y="4866218"/>
             <a:ext cx="519565" cy="300082"/>
           </a:xfrm>
           <a:prstGeom prst="rect">
